--- a/Topic_C/Exam_Practice/TC-L12_Speaking_Workshop_Review_Four_Skills_Assessment.pptx
+++ b/Topic_C/Exam_Practice/TC-L12_Speaking_Workshop_Review_Four_Skills_Assessment.pptx
@@ -615,7 +615,11 @@
           <a:lstStyle/>
           <a:p>
             <a:r>
-              <a:rPr lang="en-US" dirty="0"/>
+              <a:rPr lang="ar-SA" dirty="0">
+                <a:latin typeface="Amiri" pitchFamily="2" charset="-78"/>
+                <a:ea typeface="Amiri" pitchFamily="2" charset="-78"/>
+                <a:cs typeface="Amiri" pitchFamily="2" charset="-78"/>
+              </a:rPr>
               <a:t>ROLE PLAY C (Develop) — a holiday report.
 SET-UP IN THE BREAKOUT ROOM: A = examiner (reads the left column ONLY — the questions, in order), B = candidate (sees the task column; Core may use the help column), C = observer (ticks the feedback checklist). 1 minute preparation, about 3 minutes speaking, 1 minute feedback, then rotate.
 Task ! is the unexpected question: in the exam the candidate has not seen it — the examiner should read it without warning.
@@ -707,7 +711,11 @@
           <a:lstStyle/>
           <a:p>
             <a:r>
-              <a:rPr lang="en-US" dirty="0"/>
+              <a:rPr lang="ar-SA" dirty="0">
+                <a:latin typeface="Amiri" pitchFamily="2" charset="-78"/>
+                <a:ea typeface="Amiri" pitchFamily="2" charset="-78"/>
+                <a:cs typeface="Amiri" pitchFamily="2" charset="-78"/>
+              </a:rPr>
               <a:t>ROLE PLAY D (Stretch) — a radio debate.
 SET-UP IN THE BREAKOUT ROOM: A = examiner (reads the left column ONLY — the questions, in order), B = candidate (sees the task column; Core may use the help column), C = observer (ticks the feedback checklist). 1 minute preparation, about 3 minutes speaking, 1 minute feedback, then rotate.
 Task ! is the unexpected question: in the exam the candidate has not seen it — the examiner should read it without warning.
@@ -1243,7 +1251,11 @@
           <a:lstStyle/>
           <a:p>
             <a:r>
-              <a:rPr lang="en-US" dirty="0"/>
+              <a:rPr lang="ar-SA" dirty="0">
+                <a:latin typeface="Amiri" pitchFamily="2" charset="-78"/>
+                <a:ea typeface="Amiri" pitchFamily="2" charset="-78"/>
+                <a:cs typeface="Amiri" pitchFamily="2" charset="-78"/>
+              </a:rPr>
               <a:t>TOPIC CONVERSATION — Core. Examiner asks the questions in order and may add “لِمَاذَا؟ / هَلْ يُمْكِنُ أَنْ تَشْرَحَ أَكْثَرَ؟” to push for more. Candidate aims for one full sentence per question.
 </a:t>
             </a:r>
@@ -1332,7 +1344,11 @@
           <a:lstStyle/>
           <a:p>
             <a:r>
-              <a:rPr lang="en-US" dirty="0"/>
+              <a:rPr lang="ar-SA" dirty="0">
+                <a:latin typeface="Amiri" pitchFamily="2" charset="-78"/>
+                <a:ea typeface="Amiri" pitchFamily="2" charset="-78"/>
+                <a:cs typeface="Amiri" pitchFamily="2" charset="-78"/>
+              </a:rPr>
               <a:t>TOPIC CONVERSATION — Develop. Examiner asks the questions in order and may add “لِمَاذَا؟ / هَلْ يُمْكِنُ أَنْ تَشْرَحَ أَكْثَرَ؟” to push for more. Candidate aims for two or three sentences, mixing time frames.
 </a:t>
             </a:r>
@@ -1421,7 +1437,11 @@
           <a:lstStyle/>
           <a:p>
             <a:r>
-              <a:rPr lang="en-US" dirty="0"/>
+              <a:rPr lang="ar-SA" dirty="0">
+                <a:latin typeface="Amiri" pitchFamily="2" charset="-78"/>
+                <a:ea typeface="Amiri" pitchFamily="2" charset="-78"/>
+                <a:cs typeface="Amiri" pitchFamily="2" charset="-78"/>
+              </a:rPr>
               <a:t>TOPIC CONVERSATION — Stretch. Examiner asks the questions in order and may add “لِمَاذَا؟ / هَلْ يُمْكِنُ أَنْ تَشْرَحَ أَكْثَرَ؟” to push for more. Candidate aims for a developed answer: opinion, balance, concession and a conditional.
 </a:t>
             </a:r>
@@ -1510,7 +1530,11 @@
           <a:lstStyle/>
           <a:p>
             <a:r>
-              <a:rPr lang="en-US" dirty="0"/>
+              <a:rPr lang="ar-SA" dirty="0">
+                <a:latin typeface="Amiri" pitchFamily="2" charset="-78"/>
+                <a:ea typeface="Amiri" pitchFamily="2" charset="-78"/>
+                <a:cs typeface="Amiri" pitchFamily="2" charset="-78"/>
+              </a:rPr>
               <a:t>WELCOME (1 min) — while students join.
 • Greet each student by name as they arrive: السَّلَامُ عَلَيْكُمْ. Take the register (Pastoral Tracker: attendance 0/1).
 • 2-MINUTE CHECK-IN (SEND training): a private chat to any student who seemed unsettled last lesson — “Are you okay today? 👍 / 👎”.
@@ -2224,7 +2248,11 @@
           <a:lstStyle/>
           <a:p>
             <a:r>
-              <a:rPr lang="en-US" dirty="0"/>
+              <a:rPr lang="ar-SA" dirty="0">
+                <a:latin typeface="Amiri" pitchFamily="2" charset="-78"/>
+                <a:ea typeface="Amiri" pitchFamily="2" charset="-78"/>
+                <a:cs typeface="Amiri" pitchFamily="2" charset="-78"/>
+              </a:rPr>
               <a:t>TEACH (3 min). Role play = precise and complete; conversation = develop. Choral repetition of the repair phrases. To a girl: تُعِيدِي.</a:t>
             </a:r>
             <a:endParaRPr lang="en-US" dirty="0"/>
@@ -2576,7 +2604,11 @@
           <a:lstStyle/>
           <a:p>
             <a:r>
-              <a:rPr lang="en-US" dirty="0"/>
+              <a:rPr lang="ar-SA" dirty="0">
+                <a:latin typeface="Amiri" pitchFamily="2" charset="-78"/>
+                <a:ea typeface="Amiri" pitchFamily="2" charset="-78"/>
+                <a:cs typeface="Amiri" pitchFamily="2" charset="-78"/>
+              </a:rPr>
               <a:t>ROLE PLAY A (Core) — a train station.
 SET-UP IN THE BREAKOUT ROOM: A = examiner (reads the left column ONLY — the questions, in order), B = candidate (sees the task column; Core may use the help column), C = observer (ticks the feedback checklist). 1 minute preparation, about 3 minutes speaking, 1 minute feedback, then rotate.
 Task ! is the unexpected question: in the exam the candidate has not seen it — the examiner should read it without warning.
@@ -2668,7 +2700,11 @@
           <a:lstStyle/>
           <a:p>
             <a:r>
-              <a:rPr lang="en-US" dirty="0"/>
+              <a:rPr lang="ar-SA" dirty="0">
+                <a:latin typeface="Amiri" pitchFamily="2" charset="-78"/>
+                <a:ea typeface="Amiri" pitchFamily="2" charset="-78"/>
+                <a:cs typeface="Amiri" pitchFamily="2" charset="-78"/>
+              </a:rPr>
               <a:t>ROLE PLAY B (Core+) — a sports shop.
 SET-UP IN THE BREAKOUT ROOM: A = examiner (reads the left column ONLY — the questions, in order), B = candidate (sees the task column; Core may use the help column), C = observer (ticks the feedback checklist). 1 minute preparation, about 3 minutes speaking, 1 minute feedback, then rotate.
 Task ! is the unexpected question: in the exam the candidate has not seen it — the examiner should read it without warning.
@@ -3156,6 +3192,7 @@
                   <a:srgbClr val="D4AF37"/>
                 </a:solidFill>
                 <a:latin typeface="Amiri" pitchFamily="2" charset="-78"/>
+                <a:ea typeface="Amiri" pitchFamily="2" charset="-78"/>
                 <a:cs typeface="Amiri" pitchFamily="2" charset="-78"/>
               </a:rPr>
               <a:t>م</a:t>
@@ -3362,6 +3399,7 @@
                   <a:srgbClr val="D4AF37"/>
                 </a:solidFill>
                 <a:latin typeface="Amiri" pitchFamily="2" charset="-78"/>
+                <a:ea typeface="Amiri" pitchFamily="2" charset="-78"/>
                 <a:cs typeface="Amiri" pitchFamily="2" charset="-78"/>
               </a:rPr>
               <a:t>وَرْشَةُ التَّحَدُّثِ — امْتِحَانٌ تَجْرِيبِيٌّ</a:t>
@@ -3819,6 +3857,7 @@
                   <a:srgbClr val="D4AF37"/>
                 </a:solidFill>
                 <a:latin typeface="Amiri" pitchFamily="2" charset="-78"/>
+                <a:ea typeface="Amiri" pitchFamily="2" charset="-78"/>
                 <a:cs typeface="Amiri" pitchFamily="2" charset="-78"/>
               </a:rPr>
               <a:t>م</a:t>
@@ -4139,6 +4178,7 @@
                   <a:srgbClr val="8A6D1E"/>
                 </a:solidFill>
                 <a:latin typeface="Amiri" pitchFamily="2" charset="-78"/>
+                <a:ea typeface="Amiri" pitchFamily="2" charset="-78"/>
                 <a:cs typeface="Amiri" pitchFamily="2" charset="-78"/>
               </a:rPr>
               <a:t>عُطْلَةٌ صَدِيقَةٌ لِلْبِيئَةِ</a:t>
@@ -4419,6 +4459,7 @@
                   <a:srgbClr val="1B3B6F"/>
                 </a:solidFill>
                 <a:latin typeface="Amiri" pitchFamily="2" charset="-78"/>
+                <a:ea typeface="Amiri" pitchFamily="2" charset="-78"/>
                 <a:cs typeface="Amiri" pitchFamily="2" charset="-78"/>
               </a:rPr>
               <a:t>قَضَيْتُهَا فِي … وَحَجَزْنَا … عَلَى الإِنْتَرْنِتِ</a:t>
@@ -4495,6 +4536,7 @@
                   <a:srgbClr val="1B3B6F"/>
                 </a:solidFill>
                 <a:latin typeface="Amiri" pitchFamily="2" charset="-78"/>
+                <a:ea typeface="Amiri" pitchFamily="2" charset="-78"/>
                 <a:cs typeface="Amiri" pitchFamily="2" charset="-78"/>
               </a:rPr>
               <a:t>أَيْنَ قَضَيْتَ العُطْلَةَ؟ وَكَيْفَ حَجَزْتَ؟</a:t>
@@ -4598,6 +4640,7 @@
                   <a:srgbClr val="1B3B6F"/>
                 </a:solidFill>
                 <a:latin typeface="Amiri" pitchFamily="2" charset="-78"/>
+                <a:ea typeface="Amiri" pitchFamily="2" charset="-78"/>
                 <a:cs typeface="Amiri" pitchFamily="2" charset="-78"/>
               </a:rPr>
               <a:t>كَانَتِ الجِبَالُ … وَالوِدْيَانُ …</a:t>
@@ -4674,6 +4717,7 @@
                   <a:srgbClr val="1B3B6F"/>
                 </a:solidFill>
                 <a:latin typeface="Amiri" pitchFamily="2" charset="-78"/>
+                <a:ea typeface="Amiri" pitchFamily="2" charset="-78"/>
                 <a:cs typeface="Amiri" pitchFamily="2" charset="-78"/>
               </a:rPr>
               <a:t>صِفْ لِي المَكَانَ.</a:t>
@@ -4777,6 +4821,7 @@
                   <a:srgbClr val="1B3B6F"/>
                 </a:solidFill>
                 <a:latin typeface="Amiri" pitchFamily="2" charset="-78"/>
+                <a:ea typeface="Amiri" pitchFamily="2" charset="-78"/>
                 <a:cs typeface="Amiri" pitchFamily="2" charset="-78"/>
               </a:rPr>
               <a:t>أَوَّلًا … بِالإِضَافَةِ إِلَى ذٰلِكَ …</a:t>
@@ -4853,6 +4898,7 @@
                   <a:srgbClr val="1B3B6F"/>
                 </a:solidFill>
                 <a:latin typeface="Amiri" pitchFamily="2" charset="-78"/>
+                <a:ea typeface="Amiri" pitchFamily="2" charset="-78"/>
                 <a:cs typeface="Amiri" pitchFamily="2" charset="-78"/>
               </a:rPr>
               <a:t>لِمَاذَا تُسَمِّيهَا عُطْلَةً صَدِيقَةً لِلْبِيئَةِ؟</a:t>
@@ -4956,6 +5002,7 @@
                   <a:srgbClr val="1B3B6F"/>
                 </a:solidFill>
                 <a:latin typeface="Amiri" pitchFamily="2" charset="-78"/>
+                <a:ea typeface="Amiri" pitchFamily="2" charset="-78"/>
                 <a:cs typeface="Amiri" pitchFamily="2" charset="-78"/>
               </a:rPr>
               <a:t>لَا، لِأَنَّ … أَمَّا فِي البَيْتِ فَأَقْضِي …</a:t>
@@ -5032,6 +5079,7 @@
                   <a:srgbClr val="1B3B6F"/>
                 </a:solidFill>
                 <a:latin typeface="Amiri" pitchFamily="2" charset="-78"/>
+                <a:ea typeface="Amiri" pitchFamily="2" charset="-78"/>
                 <a:cs typeface="Amiri" pitchFamily="2" charset="-78"/>
               </a:rPr>
               <a:t>وَهَلِ اسْتَخْدَمْتَ هَاتِفَكَ كَثِيرًا؟</a:t>
@@ -5135,6 +5183,7 @@
                   <a:srgbClr val="1B3B6F"/>
                 </a:solidFill>
                 <a:latin typeface="Amiri" pitchFamily="2" charset="-78"/>
+                <a:ea typeface="Amiri" pitchFamily="2" charset="-78"/>
                 <a:cs typeface="Amiri" pitchFamily="2" charset="-78"/>
               </a:rPr>
               <a:t>نَعَمْ، سَأَعُودُ … إِذَا …</a:t>
@@ -5211,6 +5260,7 @@
                   <a:srgbClr val="1B3B6F"/>
                 </a:solidFill>
                 <a:latin typeface="Amiri" pitchFamily="2" charset="-78"/>
+                <a:ea typeface="Amiri" pitchFamily="2" charset="-78"/>
                 <a:cs typeface="Amiri" pitchFamily="2" charset="-78"/>
               </a:rPr>
               <a:t>هَلْ سَتَعُودُ إِلَى هُنَاكَ؟</a:t>
@@ -5420,6 +5470,7 @@
                   <a:srgbClr val="D4AF37"/>
                 </a:solidFill>
                 <a:latin typeface="Amiri" pitchFamily="2" charset="-78"/>
+                <a:ea typeface="Amiri" pitchFamily="2" charset="-78"/>
                 <a:cs typeface="Amiri" pitchFamily="2" charset="-78"/>
               </a:rPr>
               <a:t>م</a:t>
@@ -5740,6 +5791,7 @@
                   <a:srgbClr val="8A6D1E"/>
                 </a:solidFill>
                 <a:latin typeface="Amiri" pitchFamily="2" charset="-78"/>
+                <a:ea typeface="Amiri" pitchFamily="2" charset="-78"/>
                 <a:cs typeface="Amiri" pitchFamily="2" charset="-78"/>
               </a:rPr>
               <a:t>التِّكْنُولُوجْيَا وَالكَوْكَبُ</a:t>
@@ -6020,6 +6072,7 @@
                   <a:srgbClr val="1B3B6F"/>
                 </a:solidFill>
                 <a:latin typeface="Amiri" pitchFamily="2" charset="-78"/>
+                <a:ea typeface="Amiri" pitchFamily="2" charset="-78"/>
                 <a:cs typeface="Amiri" pitchFamily="2" charset="-78"/>
               </a:rPr>
               <a:t>مِنْ نَاحِيَةٍ … وَمِنْ نَاحِيَةٍ أُخْرَى …</a:t>
@@ -6096,6 +6149,7 @@
                   <a:srgbClr val="1B3B6F"/>
                 </a:solidFill>
                 <a:latin typeface="Amiri" pitchFamily="2" charset="-78"/>
+                <a:ea typeface="Amiri" pitchFamily="2" charset="-78"/>
                 <a:cs typeface="Amiri" pitchFamily="2" charset="-78"/>
               </a:rPr>
               <a:t>هَلْ تُسَاعِدُ التِّكْنُولُوجْيَا البِيئَةَ أَمْ تَضُرُّهَا؟</a:t>
@@ -6199,6 +6253,7 @@
                   <a:srgbClr val="1B3B6F"/>
                 </a:solidFill>
                 <a:latin typeface="Amiri" pitchFamily="2" charset="-78"/>
+                <a:ea typeface="Amiri" pitchFamily="2" charset="-78"/>
                 <a:cs typeface="Amiri" pitchFamily="2" charset="-78"/>
               </a:rPr>
               <a:t>تُرْمَى … مِمَّا يُؤَدِّي إِلَى …</a:t>
@@ -6275,6 +6330,7 @@
                   <a:srgbClr val="1B3B6F"/>
                 </a:solidFill>
                 <a:latin typeface="Amiri" pitchFamily="2" charset="-78"/>
+                <a:ea typeface="Amiri" pitchFamily="2" charset="-78"/>
                 <a:cs typeface="Amiri" pitchFamily="2" charset="-78"/>
               </a:rPr>
               <a:t>وَمَا نَتِيجَةُ رَمْيِ الأَجْهِزَةِ؟</a:t>
@@ -6378,6 +6434,7 @@
                   <a:srgbClr val="1B3B6F"/>
                 </a:solidFill>
                 <a:latin typeface="Amiri" pitchFamily="2" charset="-78"/>
+                <a:ea typeface="Amiri" pitchFamily="2" charset="-78"/>
                 <a:cs typeface="Amiri" pitchFamily="2" charset="-78"/>
               </a:rPr>
               <a:t>نَعَمْ، أَصْلَحْتُ … بَدَلًا مِنْ … فَوَفَّرْتُ …</a:t>
@@ -6454,6 +6511,7 @@
                   <a:srgbClr val="1B3B6F"/>
                 </a:solidFill>
                 <a:latin typeface="Amiri" pitchFamily="2" charset="-78"/>
+                <a:ea typeface="Amiri" pitchFamily="2" charset="-78"/>
                 <a:cs typeface="Amiri" pitchFamily="2" charset="-78"/>
               </a:rPr>
               <a:t>هَلْ غَيَّرْتَ أَنْتَ شَيْئًا؟</a:t>
@@ -6557,6 +6615,7 @@
                   <a:srgbClr val="1B3B6F"/>
                 </a:solidFill>
                 <a:latin typeface="Amiri" pitchFamily="2" charset="-78"/>
+                <a:ea typeface="Amiri" pitchFamily="2" charset="-78"/>
                 <a:cs typeface="Amiri" pitchFamily="2" charset="-78"/>
               </a:rPr>
               <a:t>صَحِيحٌ أَنَّ … غَيْرَ أَنَّهُ يَجِبُ عَلَى …</a:t>
@@ -6633,6 +6692,7 @@
                   <a:srgbClr val="1B3B6F"/>
                 </a:solidFill>
                 <a:latin typeface="Amiri" pitchFamily="2" charset="-78"/>
+                <a:ea typeface="Amiri" pitchFamily="2" charset="-78"/>
                 <a:cs typeface="Amiri" pitchFamily="2" charset="-78"/>
               </a:rPr>
               <a:t>لٰكِنَّ الشَّرِكَاتِ تُرِيدُ أَنْ نَشْتَرِيَ دَائِمًا!</a:t>
@@ -6736,6 +6796,7 @@
                   <a:srgbClr val="1B3B6F"/>
                 </a:solidFill>
                 <a:latin typeface="Amiri" pitchFamily="2" charset="-78"/>
+                <a:ea typeface="Amiri" pitchFamily="2" charset="-78"/>
                 <a:cs typeface="Amiri" pitchFamily="2" charset="-78"/>
               </a:rPr>
               <a:t>لَوْ عِشْتُ …، لَافْتَقَدْتُ …</a:t>
@@ -6812,6 +6873,7 @@
                   <a:srgbClr val="1B3B6F"/>
                 </a:solidFill>
                 <a:latin typeface="Amiri" pitchFamily="2" charset="-78"/>
+                <a:ea typeface="Amiri" pitchFamily="2" charset="-78"/>
                 <a:cs typeface="Amiri" pitchFamily="2" charset="-78"/>
               </a:rPr>
               <a:t>لَوْ عِشْتَ قَبْلَ مِئَةِ سَنَةٍ، مَاذَا كُنْتَ سَتَفْتَقِدُ؟</a:t>
@@ -7021,6 +7083,7 @@
                   <a:srgbClr val="D4AF37"/>
                 </a:solidFill>
                 <a:latin typeface="Amiri" pitchFamily="2" charset="-78"/>
+                <a:ea typeface="Amiri" pitchFamily="2" charset="-78"/>
                 <a:cs typeface="Amiri" pitchFamily="2" charset="-78"/>
               </a:rPr>
               <a:t>م</a:t>
@@ -7341,6 +7404,7 @@
                   <a:srgbClr val="8A6D1E"/>
                 </a:solidFill>
                 <a:latin typeface="Amiri" pitchFamily="2" charset="-78"/>
+                <a:ea typeface="Amiri" pitchFamily="2" charset="-78"/>
                 <a:cs typeface="Amiri" pitchFamily="2" charset="-78"/>
               </a:rPr>
               <a:t>وَرَقَةُ المُلَاحِظِ</a:t>
@@ -8811,6 +8875,7 @@
                   <a:srgbClr val="D4AF37"/>
                 </a:solidFill>
                 <a:latin typeface="Amiri" pitchFamily="2" charset="-78"/>
+                <a:ea typeface="Amiri" pitchFamily="2" charset="-78"/>
                 <a:cs typeface="Amiri" pitchFamily="2" charset="-78"/>
               </a:rPr>
               <a:t>م</a:t>
@@ -9131,6 +9196,7 @@
                   <a:srgbClr val="8A6D1E"/>
                 </a:solidFill>
                 <a:latin typeface="Amiri" pitchFamily="2" charset="-78"/>
+                <a:ea typeface="Amiri" pitchFamily="2" charset="-78"/>
                 <a:cs typeface="Amiri" pitchFamily="2" charset="-78"/>
               </a:rPr>
               <a:t>نَمُوذَجُ الإِجَابَةِ</a:t>
@@ -9373,6 +9439,7 @@
                   <a:srgbClr val="1B3B6F"/>
                 </a:solidFill>
                 <a:latin typeface="Amiri" pitchFamily="2" charset="-78"/>
+                <a:ea typeface="Amiri" pitchFamily="2" charset="-78"/>
                 <a:cs typeface="Amiri" pitchFamily="2" charset="-78"/>
               </a:rPr>
               <a:t>أُرِيدُ أَنْ أُسَافِرَ إِلَى الإِسْكَنْدَرِيَّةِ.</a:t>
@@ -9449,6 +9516,7 @@
                   <a:srgbClr val="1B3B6F"/>
                 </a:solidFill>
                 <a:latin typeface="Amiri" pitchFamily="2" charset="-78"/>
+                <a:ea typeface="Amiri" pitchFamily="2" charset="-78"/>
                 <a:cs typeface="Amiri" pitchFamily="2" charset="-78"/>
               </a:rPr>
               <a:t>صَبَاحَ الخَيْرِ، إِلَى أَيْنَ؟</a:t>
@@ -9552,6 +9620,7 @@
                   <a:srgbClr val="1B3B6F"/>
                 </a:solidFill>
                 <a:latin typeface="Amiri" pitchFamily="2" charset="-78"/>
+                <a:ea typeface="Amiri" pitchFamily="2" charset="-78"/>
                 <a:cs typeface="Amiri" pitchFamily="2" charset="-78"/>
               </a:rPr>
               <a:t>أُرِيدُ ثَلَاثَ تَذَاكِرَ، مِنْ فَضْلِكَ.</a:t>
@@ -9628,6 +9697,7 @@
                   <a:srgbClr val="1B3B6F"/>
                 </a:solidFill>
                 <a:latin typeface="Amiri" pitchFamily="2" charset="-78"/>
+                <a:ea typeface="Amiri" pitchFamily="2" charset="-78"/>
                 <a:cs typeface="Amiri" pitchFamily="2" charset="-78"/>
               </a:rPr>
               <a:t>كَمْ تَذْكِرَةً؟</a:t>
@@ -9731,6 +9801,7 @@
                   <a:srgbClr val="1B3B6F"/>
                 </a:solidFill>
                 <a:latin typeface="Amiri" pitchFamily="2" charset="-78"/>
+                <a:ea typeface="Amiri" pitchFamily="2" charset="-78"/>
                 <a:cs typeface="Amiri" pitchFamily="2" charset="-78"/>
               </a:rPr>
               <a:t>هَلْ تُوجَدُ تَذْكِرَةٌ أَرْخَصُ لِلطُّلَّابِ؟</a:t>
@@ -9807,6 +9878,7 @@
                   <a:srgbClr val="1B3B6F"/>
                 </a:solidFill>
                 <a:latin typeface="Amiri" pitchFamily="2" charset="-78"/>
+                <a:ea typeface="Amiri" pitchFamily="2" charset="-78"/>
                 <a:cs typeface="Amiri" pitchFamily="2" charset="-78"/>
               </a:rPr>
               <a:t>ثَمَنُ التَّذْكِرَةِ خَمْسُونَ جُنَيْهًا.</a:t>
@@ -9910,6 +9982,7 @@
                   <a:srgbClr val="1B3B6F"/>
                 </a:solidFill>
                 <a:latin typeface="Amiri" pitchFamily="2" charset="-78"/>
+                <a:ea typeface="Amiri" pitchFamily="2" charset="-78"/>
                 <a:cs typeface="Amiri" pitchFamily="2" charset="-78"/>
               </a:rPr>
               <a:t>شُكْرًا. كَيْفَ الجَوُّ فِي الإِسْكَنْدَرِيَّةِ الآنَ؟</a:t>
@@ -9986,6 +10059,7 @@
                   <a:srgbClr val="1B3B6F"/>
                 </a:solidFill>
                 <a:latin typeface="Amiri" pitchFamily="2" charset="-78"/>
+                <a:ea typeface="Amiri" pitchFamily="2" charset="-78"/>
                 <a:cs typeface="Amiri" pitchFamily="2" charset="-78"/>
               </a:rPr>
               <a:t>نَعَمْ، بِثَلَاثِينَ جُنَيْهًا.</a:t>
@@ -10089,6 +10163,7 @@
                   <a:srgbClr val="1B3B6F"/>
                 </a:solidFill>
                 <a:latin typeface="Amiri" pitchFamily="2" charset="-78"/>
+                <a:ea typeface="Amiri" pitchFamily="2" charset="-78"/>
                 <a:cs typeface="Amiri" pitchFamily="2" charset="-78"/>
               </a:rPr>
               <a:t>تَقَعُ مَدِينَتِي فِي شَمَالِ بَرِيطَانْيَا.</a:t>
@@ -10165,6 +10240,7 @@
                   <a:srgbClr val="1B3B6F"/>
                 </a:solidFill>
                 <a:latin typeface="Amiri" pitchFamily="2" charset="-78"/>
+                <a:ea typeface="Amiri" pitchFamily="2" charset="-78"/>
                 <a:cs typeface="Amiri" pitchFamily="2" charset="-78"/>
               </a:rPr>
               <a:t>أَيْنَ تَقَعُ مَدِينَتُكَ؟</a:t>
@@ -10374,6 +10450,7 @@
                   <a:srgbClr val="D4AF37"/>
                 </a:solidFill>
                 <a:latin typeface="Amiri" pitchFamily="2" charset="-78"/>
+                <a:ea typeface="Amiri" pitchFamily="2" charset="-78"/>
                 <a:cs typeface="Amiri" pitchFamily="2" charset="-78"/>
               </a:rPr>
               <a:t>م</a:t>
@@ -10694,6 +10771,7 @@
                   <a:srgbClr val="8A6D1E"/>
                 </a:solidFill>
                 <a:latin typeface="Amiri" pitchFamily="2" charset="-78"/>
+                <a:ea typeface="Amiri" pitchFamily="2" charset="-78"/>
                 <a:cs typeface="Amiri" pitchFamily="2" charset="-78"/>
               </a:rPr>
               <a:t>نَمُوذَجُ الإِجَابَةِ</a:t>
@@ -10936,6 +11014,7 @@
                   <a:srgbClr val="1B3B6F"/>
                 </a:solidFill>
                 <a:latin typeface="Amiri" pitchFamily="2" charset="-78"/>
+                <a:ea typeface="Amiri" pitchFamily="2" charset="-78"/>
                 <a:cs typeface="Amiri" pitchFamily="2" charset="-78"/>
               </a:rPr>
               <a:t>أَحْتَاجُ إِلَى حِذَاءٍ لِلْمَشْيِ، لِأَنِّي سَأَذْهَبُ إِلَى جِبَالِ اسْكُتْلَنْدَا.</a:t>
@@ -11012,6 +11091,7 @@
                   <a:srgbClr val="1B3B6F"/>
                 </a:solidFill>
                 <a:latin typeface="Amiri" pitchFamily="2" charset="-78"/>
+                <a:ea typeface="Amiri" pitchFamily="2" charset="-78"/>
                 <a:cs typeface="Amiri" pitchFamily="2" charset="-78"/>
               </a:rPr>
               <a:t>أَهْلًا، مَاذَا تَحْتَاجُ؟</a:t>
@@ -11115,6 +11195,7 @@
                   <a:srgbClr val="1B3B6F"/>
                 </a:solidFill>
                 <a:latin typeface="Amiri" pitchFamily="2" charset="-78"/>
+                <a:ea typeface="Amiri" pitchFamily="2" charset="-78"/>
                 <a:cs typeface="Amiri" pitchFamily="2" charset="-78"/>
               </a:rPr>
               <a:t>الجَوُّ هُنَاكَ بَارِدٌ، وَتَسْقُطُ الأَمْطَارُ كَثِيرًا.</a:t>
@@ -11191,6 +11272,7 @@
                   <a:srgbClr val="1B3B6F"/>
                 </a:solidFill>
                 <a:latin typeface="Amiri" pitchFamily="2" charset="-78"/>
+                <a:ea typeface="Amiri" pitchFamily="2" charset="-78"/>
                 <a:cs typeface="Amiri" pitchFamily="2" charset="-78"/>
               </a:rPr>
               <a:t>كَيْفَ الطَّقْسُ هُنَاكَ؟</a:t>
@@ -11294,6 +11376,7 @@
                   <a:srgbClr val="1B3B6F"/>
                 </a:solidFill>
                 <a:latin typeface="Amiri" pitchFamily="2" charset="-78"/>
+                <a:ea typeface="Amiri" pitchFamily="2" charset="-78"/>
                 <a:cs typeface="Amiri" pitchFamily="2" charset="-78"/>
               </a:rPr>
               <a:t>مِمَّ هُوَ مَصْنُوعٌ؟ وَكَمْ ثَمَنُهُ؟</a:t>
@@ -11370,6 +11453,7 @@
                   <a:srgbClr val="1B3B6F"/>
                 </a:solidFill>
                 <a:latin typeface="Amiri" pitchFamily="2" charset="-78"/>
+                <a:ea typeface="Amiri" pitchFamily="2" charset="-78"/>
                 <a:cs typeface="Amiri" pitchFamily="2" charset="-78"/>
               </a:rPr>
               <a:t>هٰذَا الحِذَاءُ مُضَادٌّ لِلْمَاءِ.</a:t>
@@ -11473,6 +11557,7 @@
                   <a:srgbClr val="1B3B6F"/>
                 </a:solidFill>
                 <a:latin typeface="Amiri" pitchFamily="2" charset="-78"/>
+                <a:ea typeface="Amiri" pitchFamily="2" charset="-78"/>
                 <a:cs typeface="Amiri" pitchFamily="2" charset="-78"/>
               </a:rPr>
               <a:t>هُوَ أَغْلَى مِنَ الحِذَاءِ الآخَرِ، لٰكِنَّهُ أَقْوَى وَأَخَفُّ، لِذٰلِكَ سَآخُذُهُ.</a:t>
@@ -11549,6 +11634,7 @@
                   <a:srgbClr val="1B3B6F"/>
                 </a:solidFill>
                 <a:latin typeface="Amiri" pitchFamily="2" charset="-78"/>
+                <a:ea typeface="Amiri" pitchFamily="2" charset="-78"/>
                 <a:cs typeface="Amiri" pitchFamily="2" charset="-78"/>
               </a:rPr>
               <a:t>مِنَ الجِلْدِ، وَثَمَنُهُ ثَمَانُونَ جُنَيْهًا.</a:t>
@@ -11652,6 +11738,7 @@
                   <a:srgbClr val="1B3B6F"/>
                 </a:solidFill>
                 <a:latin typeface="Amiri" pitchFamily="2" charset="-78"/>
+                <a:ea typeface="Amiri" pitchFamily="2" charset="-78"/>
                 <a:cs typeface="Amiri" pitchFamily="2" charset="-78"/>
               </a:rPr>
               <a:t>لَا، شُكْرًا، عِنْدِي حَقِيبَةٌ مِنَ القُمَاشِ، لِأَنَّ البْلَاسْتِيكَ يُلَوِّثُ البِيئَةَ.</a:t>
@@ -11728,6 +11815,7 @@
                   <a:srgbClr val="1B3B6F"/>
                 </a:solidFill>
                 <a:latin typeface="Amiri" pitchFamily="2" charset="-78"/>
+                <a:ea typeface="Amiri" pitchFamily="2" charset="-78"/>
                 <a:cs typeface="Amiri" pitchFamily="2" charset="-78"/>
               </a:rPr>
               <a:t>هَلْ تُرِيدُ كِيسًا بْلَاسْتِيكِيًّا؟</a:t>
@@ -11937,6 +12025,7 @@
                   <a:srgbClr val="D4AF37"/>
                 </a:solidFill>
                 <a:latin typeface="Amiri" pitchFamily="2" charset="-78"/>
+                <a:ea typeface="Amiri" pitchFamily="2" charset="-78"/>
                 <a:cs typeface="Amiri" pitchFamily="2" charset="-78"/>
               </a:rPr>
               <a:t>م</a:t>
@@ -12257,6 +12346,7 @@
                   <a:srgbClr val="8A6D1E"/>
                 </a:solidFill>
                 <a:latin typeface="Amiri" pitchFamily="2" charset="-78"/>
+                <a:ea typeface="Amiri" pitchFamily="2" charset="-78"/>
                 <a:cs typeface="Amiri" pitchFamily="2" charset="-78"/>
               </a:rPr>
               <a:t>نَمُوذَجُ الإِجَابَةِ</a:t>
@@ -12499,6 +12589,7 @@
                   <a:srgbClr val="1B3B6F"/>
                 </a:solidFill>
                 <a:latin typeface="Amiri" pitchFamily="2" charset="-78"/>
+                <a:ea typeface="Amiri" pitchFamily="2" charset="-78"/>
                 <a:cs typeface="Amiri" pitchFamily="2" charset="-78"/>
               </a:rPr>
               <a:t>قَضَيْتُهَا فِي جِبَالِ الأَطْلَسِ فِي المَغْرِبِ، وَحَجَزْنَا بَيْتًا رِيفِيًّا صَغِيرًا عَلَى الإِنْتَرْنِتِ.</a:t>
@@ -12575,6 +12666,7 @@
                   <a:srgbClr val="1B3B6F"/>
                 </a:solidFill>
                 <a:latin typeface="Amiri" pitchFamily="2" charset="-78"/>
+                <a:ea typeface="Amiri" pitchFamily="2" charset="-78"/>
                 <a:cs typeface="Amiri" pitchFamily="2" charset="-78"/>
               </a:rPr>
               <a:t>أَيْنَ قَضَيْتَ العُطْلَةَ؟ وَكَيْفَ حَجَزْتَ؟</a:t>
@@ -12678,6 +12770,7 @@
                   <a:srgbClr val="1B3B6F"/>
                 </a:solidFill>
                 <a:latin typeface="Amiri" pitchFamily="2" charset="-78"/>
+                <a:ea typeface="Amiri" pitchFamily="2" charset="-78"/>
                 <a:cs typeface="Amiri" pitchFamily="2" charset="-78"/>
               </a:rPr>
               <a:t>كَانَتِ الجِبَالُ عَالِيَةً، وَالوِدْيَانُ خَضْرَاءَ، وَالبَيْتُ مَبْنِيٌّ مِنَ الطِّينِ وَالحَجَرِ.</a:t>
@@ -12754,6 +12847,7 @@
                   <a:srgbClr val="1B3B6F"/>
                 </a:solidFill>
                 <a:latin typeface="Amiri" pitchFamily="2" charset="-78"/>
+                <a:ea typeface="Amiri" pitchFamily="2" charset="-78"/>
                 <a:cs typeface="Amiri" pitchFamily="2" charset="-78"/>
               </a:rPr>
               <a:t>صِفْ لِي المَكَانَ.</a:t>
@@ -12857,6 +12951,7 @@
                   <a:srgbClr val="1B3B6F"/>
                 </a:solidFill>
                 <a:latin typeface="Amiri" pitchFamily="2" charset="-78"/>
+                <a:ea typeface="Amiri" pitchFamily="2" charset="-78"/>
                 <a:cs typeface="Amiri" pitchFamily="2" charset="-78"/>
               </a:rPr>
               <a:t>أَوَّلًا، سَافَرْنَا بِالقِطَارِ بَدَلًا مِنَ الطَّائِرَةِ؛ بِالإِضَافَةِ إِلَى ذٰلِكَ، كَانَ البَيْتُ يَعْمَلُ بِالطَّاقَةِ الشَّمْسِيَّةِ.</a:t>
@@ -12933,6 +13028,7 @@
                   <a:srgbClr val="1B3B6F"/>
                 </a:solidFill>
                 <a:latin typeface="Amiri" pitchFamily="2" charset="-78"/>
+                <a:ea typeface="Amiri" pitchFamily="2" charset="-78"/>
                 <a:cs typeface="Amiri" pitchFamily="2" charset="-78"/>
               </a:rPr>
               <a:t>لِمَاذَا تُسَمِّيهَا عُطْلَةً صَدِيقَةً لِلْبِيئَةِ؟</a:t>
@@ -13036,6 +13132,7 @@
                   <a:srgbClr val="1B3B6F"/>
                 </a:solidFill>
                 <a:latin typeface="Amiri" pitchFamily="2" charset="-78"/>
+                <a:ea typeface="Amiri" pitchFamily="2" charset="-78"/>
                 <a:cs typeface="Amiri" pitchFamily="2" charset="-78"/>
               </a:rPr>
               <a:t>لَا، لِأَنَّ الإِنْتَرْنِتَ كَانَ ضَعِيفًا، أَمَّا فِي البَيْتِ فَأَقْضِي سَاعَاتٍ أَمَامَ الشَّاشَةِ.</a:t>
@@ -13112,6 +13209,7 @@
                   <a:srgbClr val="1B3B6F"/>
                 </a:solidFill>
                 <a:latin typeface="Amiri" pitchFamily="2" charset="-78"/>
+                <a:ea typeface="Amiri" pitchFamily="2" charset="-78"/>
                 <a:cs typeface="Amiri" pitchFamily="2" charset="-78"/>
               </a:rPr>
               <a:t>وَهَلِ اسْتَخْدَمْتَ هَاتِفَكَ كَثِيرًا؟</a:t>
@@ -13215,6 +13313,7 @@
                   <a:srgbClr val="1B3B6F"/>
                 </a:solidFill>
                 <a:latin typeface="Amiri" pitchFamily="2" charset="-78"/>
+                <a:ea typeface="Amiri" pitchFamily="2" charset="-78"/>
                 <a:cs typeface="Amiri" pitchFamily="2" charset="-78"/>
               </a:rPr>
               <a:t>نَعَمْ، سَأَعُودُ فِي الرَّبِيعِ إِذَا وَفَّرْتُ مِنْ مَصْرُوفِي، لِأَنَّ الجَوَّ سَيَكُونُ أَدْفَأَ.</a:t>
@@ -13291,6 +13390,7 @@
                   <a:srgbClr val="1B3B6F"/>
                 </a:solidFill>
                 <a:latin typeface="Amiri" pitchFamily="2" charset="-78"/>
+                <a:ea typeface="Amiri" pitchFamily="2" charset="-78"/>
                 <a:cs typeface="Amiri" pitchFamily="2" charset="-78"/>
               </a:rPr>
               <a:t>هَلْ سَتَعُودُ إِلَى هُنَاكَ؟</a:t>
@@ -13500,6 +13600,7 @@
                   <a:srgbClr val="D4AF37"/>
                 </a:solidFill>
                 <a:latin typeface="Amiri" pitchFamily="2" charset="-78"/>
+                <a:ea typeface="Amiri" pitchFamily="2" charset="-78"/>
                 <a:cs typeface="Amiri" pitchFamily="2" charset="-78"/>
               </a:rPr>
               <a:t>م</a:t>
@@ -13820,6 +13921,7 @@
                   <a:srgbClr val="8A6D1E"/>
                 </a:solidFill>
                 <a:latin typeface="Amiri" pitchFamily="2" charset="-78"/>
+                <a:ea typeface="Amiri" pitchFamily="2" charset="-78"/>
                 <a:cs typeface="Amiri" pitchFamily="2" charset="-78"/>
               </a:rPr>
               <a:t>نَمُوذَجُ الإِجَابَةِ</a:t>
@@ -14062,6 +14164,7 @@
                   <a:srgbClr val="1B3B6F"/>
                 </a:solidFill>
                 <a:latin typeface="Amiri" pitchFamily="2" charset="-78"/>
+                <a:ea typeface="Amiri" pitchFamily="2" charset="-78"/>
                 <a:cs typeface="Amiri" pitchFamily="2" charset="-78"/>
               </a:rPr>
               <a:t>مِنْ نَاحِيَةٍ، تُسَاعِدُنَا الأَلْوَاحُ الشَّمْسِيَّةُ وَالسَّيَّارَاتُ الكَهْرَبَائِيَّةُ، وَمِنْ نَاحِيَةٍ أُخْرَى، تُرْمَى مَلَايِينُ الأَجْهِزَةِ كُلَّ سَنَةٍ.</a:t>
@@ -14138,6 +14241,7 @@
                   <a:srgbClr val="1B3B6F"/>
                 </a:solidFill>
                 <a:latin typeface="Amiri" pitchFamily="2" charset="-78"/>
+                <a:ea typeface="Amiri" pitchFamily="2" charset="-78"/>
                 <a:cs typeface="Amiri" pitchFamily="2" charset="-78"/>
               </a:rPr>
               <a:t>هَلْ تُسَاعِدُ التِّكْنُولُوجْيَا البِيئَةَ أَمْ تَضُرُّهَا؟</a:t>
@@ -14241,6 +14345,7 @@
                   <a:srgbClr val="1B3B6F"/>
                 </a:solidFill>
                 <a:latin typeface="Amiri" pitchFamily="2" charset="-78"/>
+                <a:ea typeface="Amiri" pitchFamily="2" charset="-78"/>
                 <a:cs typeface="Amiri" pitchFamily="2" charset="-78"/>
               </a:rPr>
               <a:t>تُرْمَى فِي مَكَبَّاتٍ بَعِيدَةٍ، مِمَّا يُؤَدِّي إِلَى تَلَوُّثِ التُّرْبَةِ وَالمِيَاهِ بِالمَعَادِنِ الضَّارَّةِ.</a:t>
@@ -14317,6 +14422,7 @@
                   <a:srgbClr val="1B3B6F"/>
                 </a:solidFill>
                 <a:latin typeface="Amiri" pitchFamily="2" charset="-78"/>
+                <a:ea typeface="Amiri" pitchFamily="2" charset="-78"/>
                 <a:cs typeface="Amiri" pitchFamily="2" charset="-78"/>
               </a:rPr>
               <a:t>وَمَا نَتِيجَةُ رَمْيِ الأَجْهِزَةِ؟</a:t>
@@ -14420,6 +14526,7 @@
                   <a:srgbClr val="1B3B6F"/>
                 </a:solidFill>
                 <a:latin typeface="Amiri" pitchFamily="2" charset="-78"/>
+                <a:ea typeface="Amiri" pitchFamily="2" charset="-78"/>
                 <a:cs typeface="Amiri" pitchFamily="2" charset="-78"/>
               </a:rPr>
               <a:t>نَعَمْ، أَصْلَحْتُ شَاشَةَ هَاتِفِي بَدَلًا مِنْ شِرَاءِ هَاتِفٍ جَدِيدٍ، فَوَفَّرْتُ مِئَتَيْ جُنَيْهٍ.</a:t>
@@ -14496,6 +14603,7 @@
                   <a:srgbClr val="1B3B6F"/>
                 </a:solidFill>
                 <a:latin typeface="Amiri" pitchFamily="2" charset="-78"/>
+                <a:ea typeface="Amiri" pitchFamily="2" charset="-78"/>
                 <a:cs typeface="Amiri" pitchFamily="2" charset="-78"/>
               </a:rPr>
               <a:t>هَلْ غَيَّرْتَ أَنْتَ شَيْئًا؟</a:t>
@@ -14599,6 +14707,7 @@
                   <a:srgbClr val="1B3B6F"/>
                 </a:solidFill>
                 <a:latin typeface="Amiri" pitchFamily="2" charset="-78"/>
+                <a:ea typeface="Amiri" pitchFamily="2" charset="-78"/>
                 <a:cs typeface="Amiri" pitchFamily="2" charset="-78"/>
               </a:rPr>
               <a:t>صَحِيحٌ أَنَّ لِلشَّرِكَاتِ مَصْلَحَةً فِي ذٰلِكَ، غَيْرَ أَنَّهُ يَجِبُ عَلَى الحُكُومَاتِ أَنْ تُلْزِمَهَا بِصِنَاعَةِ أَجْهِزَةٍ تَدُومُ أَطْوَلَ.</a:t>
@@ -14675,6 +14784,7 @@
                   <a:srgbClr val="1B3B6F"/>
                 </a:solidFill>
                 <a:latin typeface="Amiri" pitchFamily="2" charset="-78"/>
+                <a:ea typeface="Amiri" pitchFamily="2" charset="-78"/>
                 <a:cs typeface="Amiri" pitchFamily="2" charset="-78"/>
               </a:rPr>
               <a:t>لٰكِنَّ الشَّرِكَاتِ تُرِيدُ أَنْ نَشْتَرِيَ دَائِمًا!</a:t>
@@ -14778,6 +14888,7 @@
                   <a:srgbClr val="1B3B6F"/>
                 </a:solidFill>
                 <a:latin typeface="Amiri" pitchFamily="2" charset="-78"/>
+                <a:ea typeface="Amiri" pitchFamily="2" charset="-78"/>
                 <a:cs typeface="Amiri" pitchFamily="2" charset="-78"/>
               </a:rPr>
               <a:t>لَوْ عِشْتُ قَبْلَ مِئَةِ سَنَةٍ، لَافْتَقَدْتُ التَّوَاصُلَ مَعَ أَقَارِبِي فِي الخَارِجِ، لٰكِنِّي رُبَّمَا كُنْتُ سَأَتَنَفَّسُ هَوَاءً أَنْظَفَ.</a:t>
@@ -14854,6 +14965,7 @@
                   <a:srgbClr val="1B3B6F"/>
                 </a:solidFill>
                 <a:latin typeface="Amiri" pitchFamily="2" charset="-78"/>
+                <a:ea typeface="Amiri" pitchFamily="2" charset="-78"/>
                 <a:cs typeface="Amiri" pitchFamily="2" charset="-78"/>
               </a:rPr>
               <a:t>لَوْ عِشْتَ قَبْلَ مِئَةِ سَنَةٍ، مَاذَا كُنْتَ سَتَفْتَقِدُ؟</a:t>
@@ -15063,6 +15175,7 @@
                   <a:srgbClr val="D4AF37"/>
                 </a:solidFill>
                 <a:latin typeface="Amiri" pitchFamily="2" charset="-78"/>
+                <a:ea typeface="Amiri" pitchFamily="2" charset="-78"/>
                 <a:cs typeface="Amiri" pitchFamily="2" charset="-78"/>
               </a:rPr>
               <a:t>م</a:t>
@@ -15383,6 +15496,7 @@
                   <a:srgbClr val="8A6D1E"/>
                 </a:solidFill>
                 <a:latin typeface="Amiri" pitchFamily="2" charset="-78"/>
+                <a:ea typeface="Amiri" pitchFamily="2" charset="-78"/>
                 <a:cs typeface="Amiri" pitchFamily="2" charset="-78"/>
               </a:rPr>
               <a:t>العَالَمُ مِنْ حَوْلِي</a:t>
@@ -15663,6 +15777,7 @@
                   <a:srgbClr val="1B3B6F"/>
                 </a:solidFill>
                 <a:latin typeface="Amiri" pitchFamily="2" charset="-78"/>
+                <a:ea typeface="Amiri" pitchFamily="2" charset="-78"/>
                 <a:cs typeface="Amiri" pitchFamily="2" charset="-78"/>
               </a:rPr>
               <a:t>أَنَا … وَتَقَعُ مَدِينَتِي فِي …</a:t>
@@ -15739,6 +15854,7 @@
                   <a:srgbClr val="1B3B6F"/>
                 </a:solidFill>
                 <a:latin typeface="Amiri" pitchFamily="2" charset="-78"/>
+                <a:ea typeface="Amiri" pitchFamily="2" charset="-78"/>
                 <a:cs typeface="Amiri" pitchFamily="2" charset="-78"/>
               </a:rPr>
               <a:t>مِنْ أَيْنَ أَنْتَ؟ وَأَيْنَ تَقَعُ مَدِينَتُكَ؟</a:t>
@@ -15907,6 +16023,7 @@
                   <a:srgbClr val="1B3B6F"/>
                 </a:solidFill>
                 <a:latin typeface="Amiri" pitchFamily="2" charset="-78"/>
+                <a:ea typeface="Amiri" pitchFamily="2" charset="-78"/>
                 <a:cs typeface="Amiri" pitchFamily="2" charset="-78"/>
               </a:rPr>
               <a:t>فِي الشِّتَاءِ الجَوُّ … وَتَسْقُطُ …</a:t>
@@ -15983,6 +16100,7 @@
                   <a:srgbClr val="1B3B6F"/>
                 </a:solidFill>
                 <a:latin typeface="Amiri" pitchFamily="2" charset="-78"/>
+                <a:ea typeface="Amiri" pitchFamily="2" charset="-78"/>
                 <a:cs typeface="Amiri" pitchFamily="2" charset="-78"/>
               </a:rPr>
               <a:t>كَيْفَ الطَّقْسُ فِي الشِّتَاءِ عِنْدَكُمْ؟</a:t>
@@ -16151,6 +16269,7 @@
                   <a:srgbClr val="1B3B6F"/>
                 </a:solidFill>
                 <a:latin typeface="Amiri" pitchFamily="2" charset="-78"/>
+                <a:ea typeface="Amiri" pitchFamily="2" charset="-78"/>
                 <a:cs typeface="Amiri" pitchFamily="2" charset="-78"/>
               </a:rPr>
               <a:t>يُوجَدُ … وَتُوجَدُ …</a:t>
@@ -16227,6 +16346,7 @@
                   <a:srgbClr val="1B3B6F"/>
                 </a:solidFill>
                 <a:latin typeface="Amiri" pitchFamily="2" charset="-78"/>
+                <a:ea typeface="Amiri" pitchFamily="2" charset="-78"/>
                 <a:cs typeface="Amiri" pitchFamily="2" charset="-78"/>
               </a:rPr>
               <a:t>مَاذَا يُوجَدُ قُرْبَ بَيْتِكَ؟</a:t>
@@ -16395,6 +16515,7 @@
                   <a:srgbClr val="1B3B6F"/>
                 </a:solidFill>
                 <a:latin typeface="Amiri" pitchFamily="2" charset="-78"/>
+                <a:ea typeface="Amiri" pitchFamily="2" charset="-78"/>
                 <a:cs typeface="Amiri" pitchFamily="2" charset="-78"/>
               </a:rPr>
               <a:t>أَسْتَخْدِمُهُ …</a:t>
@@ -16471,6 +16592,7 @@
                   <a:srgbClr val="1B3B6F"/>
                 </a:solidFill>
                 <a:latin typeface="Amiri" pitchFamily="2" charset="-78"/>
+                <a:ea typeface="Amiri" pitchFamily="2" charset="-78"/>
                 <a:cs typeface="Amiri" pitchFamily="2" charset="-78"/>
               </a:rPr>
               <a:t>كَمْ سَاعَةً تَسْتَخْدِمُ الإِنْتَرْنِتَ؟</a:t>
@@ -16639,6 +16761,7 @@
                   <a:srgbClr val="1B3B6F"/>
                 </a:solidFill>
                 <a:latin typeface="Amiri" pitchFamily="2" charset="-78"/>
+                <a:ea typeface="Amiri" pitchFamily="2" charset="-78"/>
                 <a:cs typeface="Amiri" pitchFamily="2" charset="-78"/>
               </a:rPr>
               <a:t>أُعِيدُ … / أُطْفِئُ …</a:t>
@@ -16715,6 +16838,7 @@
                   <a:srgbClr val="1B3B6F"/>
                 </a:solidFill>
                 <a:latin typeface="Amiri" pitchFamily="2" charset="-78"/>
+                <a:ea typeface="Amiri" pitchFamily="2" charset="-78"/>
                 <a:cs typeface="Amiri" pitchFamily="2" charset="-78"/>
               </a:rPr>
               <a:t>مَاذَا تَفْعَلُ لِحِمَايَةِ البِيئَةِ؟</a:t>
@@ -16869,6 +16993,7 @@
                   <a:srgbClr val="1B3B6F"/>
                 </a:solidFill>
                 <a:latin typeface="Amiri" pitchFamily="2" charset="-78"/>
+                <a:ea typeface="Amiri" pitchFamily="2" charset="-78"/>
                 <a:cs typeface="Amiri" pitchFamily="2" charset="-78"/>
               </a:rPr>
               <a:t>عَفْوًا، هَلْ يُمْكِنُ أَنْ تُعِيدَ السُّؤَالَ؟</a:t>
@@ -17002,6 +17127,7 @@
                   <a:srgbClr val="D4AF37"/>
                 </a:solidFill>
                 <a:latin typeface="Amiri" pitchFamily="2" charset="-78"/>
+                <a:ea typeface="Amiri" pitchFamily="2" charset="-78"/>
                 <a:cs typeface="Amiri" pitchFamily="2" charset="-78"/>
               </a:rPr>
               <a:t>م</a:t>
@@ -17322,6 +17448,7 @@
                   <a:srgbClr val="8A6D1E"/>
                 </a:solidFill>
                 <a:latin typeface="Amiri" pitchFamily="2" charset="-78"/>
+                <a:ea typeface="Amiri" pitchFamily="2" charset="-78"/>
                 <a:cs typeface="Amiri" pitchFamily="2" charset="-78"/>
               </a:rPr>
               <a:t>أَنَا وَعَالَمِي</a:t>
@@ -17602,6 +17729,7 @@
                   <a:srgbClr val="1B3B6F"/>
                 </a:solidFill>
                 <a:latin typeface="Amiri" pitchFamily="2" charset="-78"/>
+                <a:ea typeface="Amiri" pitchFamily="2" charset="-78"/>
                 <a:cs typeface="Amiri" pitchFamily="2" charset="-78"/>
               </a:rPr>
               <a:t>زُرْتُ … كَانَتِ … وَكَانَ …</a:t>
@@ -17678,6 +17806,7 @@
                   <a:srgbClr val="1B3B6F"/>
                 </a:solidFill>
                 <a:latin typeface="Amiri" pitchFamily="2" charset="-78"/>
+                <a:ea typeface="Amiri" pitchFamily="2" charset="-78"/>
                 <a:cs typeface="Amiri" pitchFamily="2" charset="-78"/>
               </a:rPr>
               <a:t>صِفْ مَكَانًا طَبِيعِيًّا جَمِيلًا زُرْتَهُ.</a:t>
@@ -17781,6 +17910,7 @@
                   <a:srgbClr val="1B3B6F"/>
                 </a:solidFill>
                 <a:latin typeface="Amiri" pitchFamily="2" charset="-78"/>
+                <a:ea typeface="Amiri" pitchFamily="2" charset="-78"/>
                 <a:cs typeface="Amiri" pitchFamily="2" charset="-78"/>
               </a:rPr>
               <a:t>أَكْبَرُ مُشْكِلَةٍ … بِسَبَبِ … لِذٰلِكَ يَنْبَغِي …</a:t>
@@ -17857,6 +17987,7 @@
                   <a:srgbClr val="1B3B6F"/>
                 </a:solidFill>
                 <a:latin typeface="Amiri" pitchFamily="2" charset="-78"/>
+                <a:ea typeface="Amiri" pitchFamily="2" charset="-78"/>
                 <a:cs typeface="Amiri" pitchFamily="2" charset="-78"/>
               </a:rPr>
               <a:t>مَا أَكْبَرُ مُشْكِلَةٍ بِيئِيَّةٍ فِي مَدِينَتِكَ؟ وَمَا الحَلُّ؟</a:t>
@@ -17960,6 +18091,7 @@
                   <a:srgbClr val="1B3B6F"/>
                 </a:solidFill>
                 <a:latin typeface="Amiri" pitchFamily="2" charset="-78"/>
+                <a:ea typeface="Amiri" pitchFamily="2" charset="-78"/>
                 <a:cs typeface="Amiri" pitchFamily="2" charset="-78"/>
               </a:rPr>
               <a:t>اشْتَرَيْتُ … مَصْنُوعًا مِنْ … وَكَانَ ثَمَنُهُ …</a:t>
@@ -18036,6 +18168,7 @@
                   <a:srgbClr val="1B3B6F"/>
                 </a:solidFill>
                 <a:latin typeface="Amiri" pitchFamily="2" charset="-78"/>
+                <a:ea typeface="Amiri" pitchFamily="2" charset="-78"/>
                 <a:cs typeface="Amiri" pitchFamily="2" charset="-78"/>
               </a:rPr>
               <a:t>صِفْ آخِرَ شَيْءٍ اشْتَرَيْتَهُ.</a:t>
@@ -18139,6 +18272,7 @@
                   <a:srgbClr val="1B3B6F"/>
                 </a:solidFill>
                 <a:latin typeface="Amiri" pitchFamily="2" charset="-78"/>
+                <a:ea typeface="Amiri" pitchFamily="2" charset="-78"/>
                 <a:cs typeface="Amiri" pitchFamily="2" charset="-78"/>
               </a:rPr>
               <a:t>أَحْجِزُ … وَأَبْحَثُ عَنْ …</a:t>
@@ -18215,6 +18349,7 @@
                   <a:srgbClr val="1B3B6F"/>
                 </a:solidFill>
                 <a:latin typeface="Amiri" pitchFamily="2" charset="-78"/>
+                <a:ea typeface="Amiri" pitchFamily="2" charset="-78"/>
                 <a:cs typeface="Amiri" pitchFamily="2" charset="-78"/>
               </a:rPr>
               <a:t>كَيْفَ تَسْتَخْدِمُ التِّكْنُولُوجْيَا فِي السَّفَرِ؟</a:t>
@@ -18318,6 +18453,7 @@
                   <a:srgbClr val="1B3B6F"/>
                 </a:solidFill>
                 <a:latin typeface="Amiri" pitchFamily="2" charset="-78"/>
+                <a:ea typeface="Amiri" pitchFamily="2" charset="-78"/>
                 <a:cs typeface="Amiri" pitchFamily="2" charset="-78"/>
               </a:rPr>
               <a:t>سَأَسْكُنُ فِي … لِأَنَّ …</a:t>
@@ -18394,6 +18530,7 @@
                   <a:srgbClr val="1B3B6F"/>
                 </a:solidFill>
                 <a:latin typeface="Amiri" pitchFamily="2" charset="-78"/>
+                <a:ea typeface="Amiri" pitchFamily="2" charset="-78"/>
                 <a:cs typeface="Amiri" pitchFamily="2" charset="-78"/>
               </a:rPr>
               <a:t>أَيْنَ تُحِبُّ أَنْ تَسْكُنَ فِي المُسْتَقْبَلِ؟</a:t>
@@ -18603,6 +18740,7 @@
                   <a:srgbClr val="D4AF37"/>
                 </a:solidFill>
                 <a:latin typeface="Amiri" pitchFamily="2" charset="-78"/>
+                <a:ea typeface="Amiri" pitchFamily="2" charset="-78"/>
                 <a:cs typeface="Amiri" pitchFamily="2" charset="-78"/>
               </a:rPr>
               <a:t>م</a:t>
@@ -18923,6 +19061,7 @@
                   <a:srgbClr val="8A6D1E"/>
                 </a:solidFill>
                 <a:latin typeface="Amiri" pitchFamily="2" charset="-78"/>
+                <a:ea typeface="Amiri" pitchFamily="2" charset="-78"/>
                 <a:cs typeface="Amiri" pitchFamily="2" charset="-78"/>
               </a:rPr>
               <a:t>العَالَمُ وَمُسْتَقْبَلُهُ</a:t>
@@ -19203,6 +19342,7 @@
                   <a:srgbClr val="1B3B6F"/>
                 </a:solidFill>
                 <a:latin typeface="Amiri" pitchFamily="2" charset="-78"/>
+                <a:ea typeface="Amiri" pitchFamily="2" charset="-78"/>
                 <a:cs typeface="Amiri" pitchFamily="2" charset="-78"/>
               </a:rPr>
               <a:t>صَحِيحٌ أَنَّ … غَيْرَ أَنَّ …</a:t>
@@ -19279,6 +19419,7 @@
                   <a:srgbClr val="1B3B6F"/>
                 </a:solidFill>
                 <a:latin typeface="Amiri" pitchFamily="2" charset="-78"/>
+                <a:ea typeface="Amiri" pitchFamily="2" charset="-78"/>
                 <a:cs typeface="Amiri" pitchFamily="2" charset="-78"/>
               </a:rPr>
               <a:t>هَلْ يَجِبُ أَنْ نُسَافِرَ أَقَلَّ لِنَحْمِيَ البِيئَةَ؟</a:t>
@@ -19382,6 +19523,7 @@
                   <a:srgbClr val="1B3B6F"/>
                 </a:solidFill>
                 <a:latin typeface="Amiri" pitchFamily="2" charset="-78"/>
+                <a:ea typeface="Amiri" pitchFamily="2" charset="-78"/>
                 <a:cs typeface="Amiri" pitchFamily="2" charset="-78"/>
               </a:rPr>
               <a:t>كَانَ وَالِدَايَ … أَمَّا اليَوْمَ فَنَفْعَلُ …</a:t>
@@ -19458,6 +19600,7 @@
                   <a:srgbClr val="1B3B6F"/>
                 </a:solidFill>
                 <a:latin typeface="Amiri" pitchFamily="2" charset="-78"/>
+                <a:ea typeface="Amiri" pitchFamily="2" charset="-78"/>
                 <a:cs typeface="Amiri" pitchFamily="2" charset="-78"/>
               </a:rPr>
               <a:t>كَيْفَ تَغَيَّرَ العَالَمُ مُنْذُ طُفُولَةِ وَالِدَيْكَ؟</a:t>
@@ -19561,6 +19704,7 @@
                   <a:srgbClr val="1B3B6F"/>
                 </a:solidFill>
                 <a:latin typeface="Amiri" pitchFamily="2" charset="-78"/>
+                <a:ea typeface="Amiri" pitchFamily="2" charset="-78"/>
                 <a:cs typeface="Amiri" pitchFamily="2" charset="-78"/>
               </a:rPr>
               <a:t>أَرَى أَنَّ المَسْؤُولِيَّةَ … يَجِبُ عَلَى … وَعَلَى …</a:t>
@@ -19637,6 +19781,7 @@
                   <a:srgbClr val="1B3B6F"/>
                 </a:solidFill>
                 <a:latin typeface="Amiri" pitchFamily="2" charset="-78"/>
+                <a:ea typeface="Amiri" pitchFamily="2" charset="-78"/>
                 <a:cs typeface="Amiri" pitchFamily="2" charset="-78"/>
               </a:rPr>
               <a:t>مَنِ المَسْؤُولُ عَنْ مُسْتَقْبَلِ المُدُنِ؟</a:t>
@@ -19740,6 +19885,7 @@
                   <a:srgbClr val="1B3B6F"/>
                 </a:solidFill>
                 <a:latin typeface="Amiri" pitchFamily="2" charset="-78"/>
+                <a:ea typeface="Amiri" pitchFamily="2" charset="-78"/>
                 <a:cs typeface="Amiri" pitchFamily="2" charset="-78"/>
               </a:rPr>
               <a:t>مِنْ نَاحِيَةٍ … وَمِنْ نَاحِيَةٍ أُخْرَى …</a:t>
@@ -19816,6 +19962,7 @@
                   <a:srgbClr val="1B3B6F"/>
                 </a:solidFill>
                 <a:latin typeface="Amiri" pitchFamily="2" charset="-78"/>
+                <a:ea typeface="Amiri" pitchFamily="2" charset="-78"/>
                 <a:cs typeface="Amiri" pitchFamily="2" charset="-78"/>
               </a:rPr>
               <a:t>هَلِ التَّسَوُّقُ عَلَى الإِنْتَرْنِتِ يُفِيدُ المُسْتَهْلِكَ؟</a:t>
@@ -19919,6 +20066,7 @@
                   <a:srgbClr val="1B3B6F"/>
                 </a:solidFill>
                 <a:latin typeface="Amiri" pitchFamily="2" charset="-78"/>
+                <a:ea typeface="Amiri" pitchFamily="2" charset="-78"/>
                 <a:cs typeface="Amiri" pitchFamily="2" charset="-78"/>
               </a:rPr>
               <a:t>لَوْ صَمَّمْتُهَا، لَجَعَلْتُهَا …</a:t>
@@ -19995,6 +20143,7 @@
                   <a:srgbClr val="1B3B6F"/>
                 </a:solidFill>
                 <a:latin typeface="Amiri" pitchFamily="2" charset="-78"/>
+                <a:ea typeface="Amiri" pitchFamily="2" charset="-78"/>
                 <a:cs typeface="Amiri" pitchFamily="2" charset="-78"/>
               </a:rPr>
               <a:t>لَوْ صَمَّمْتَ مَدْرَسَةَ المُسْتَقْبَلِ، كَيْفَ تَكُونُ؟</a:t>
@@ -20204,6 +20353,7 @@
                   <a:srgbClr val="D4AF37"/>
                 </a:solidFill>
                 <a:latin typeface="Amiri" pitchFamily="2" charset="-78"/>
+                <a:ea typeface="Amiri" pitchFamily="2" charset="-78"/>
                 <a:cs typeface="Amiri" pitchFamily="2" charset="-78"/>
               </a:rPr>
               <a:t>م</a:t>
@@ -20524,6 +20674,7 @@
                   <a:srgbClr val="8A6D1E"/>
                 </a:solidFill>
                 <a:latin typeface="Amiri" pitchFamily="2" charset="-78"/>
+                <a:ea typeface="Amiri" pitchFamily="2" charset="-78"/>
                 <a:cs typeface="Amiri" pitchFamily="2" charset="-78"/>
               </a:rPr>
               <a:t>آدَابُ الصَّفِّ</a:t>
@@ -22055,6 +22206,7 @@
                   <a:srgbClr val="D4AF37"/>
                 </a:solidFill>
                 <a:latin typeface="Amiri" pitchFamily="2" charset="-78"/>
+                <a:ea typeface="Amiri" pitchFamily="2" charset="-78"/>
                 <a:cs typeface="Amiri" pitchFamily="2" charset="-78"/>
               </a:rPr>
               <a:t>م</a:t>
@@ -22375,6 +22527,7 @@
                   <a:srgbClr val="8A6D1E"/>
                 </a:solidFill>
                 <a:latin typeface="Amiri" pitchFamily="2" charset="-78"/>
+                <a:ea typeface="Amiri" pitchFamily="2" charset="-78"/>
                 <a:cs typeface="Amiri" pitchFamily="2" charset="-78"/>
               </a:rPr>
               <a:t>نَمُوذَجُ الإِجَابَةِ</a:t>
@@ -22617,6 +22770,7 @@
                   <a:srgbClr val="1B3B6F"/>
                 </a:solidFill>
                 <a:latin typeface="Amiri" pitchFamily="2" charset="-78"/>
+                <a:ea typeface="Amiri" pitchFamily="2" charset="-78"/>
                 <a:cs typeface="Amiri" pitchFamily="2" charset="-78"/>
               </a:rPr>
               <a:t>أَنَا بَرِيطَانِيٌّ، وَتَقَعُ مَدِينَتِي فِي جَنُوبِ إِنْجِلْتِرَا.</a:t>
@@ -22693,6 +22847,7 @@
                   <a:srgbClr val="1B3B6F"/>
                 </a:solidFill>
                 <a:latin typeface="Amiri" pitchFamily="2" charset="-78"/>
+                <a:ea typeface="Amiri" pitchFamily="2" charset="-78"/>
                 <a:cs typeface="Amiri" pitchFamily="2" charset="-78"/>
               </a:rPr>
               <a:t>مِنْ أَيْنَ أَنْتَ؟ وَأَيْنَ تَقَعُ مَدِينَتُكَ؟</a:t>
@@ -22796,6 +22951,7 @@
                   <a:srgbClr val="1B3B6F"/>
                 </a:solidFill>
                 <a:latin typeface="Amiri" pitchFamily="2" charset="-78"/>
+                <a:ea typeface="Amiri" pitchFamily="2" charset="-78"/>
                 <a:cs typeface="Amiri" pitchFamily="2" charset="-78"/>
               </a:rPr>
               <a:t>فِي الشِّتَاءِ الجَوُّ بَارِدٌ، وَتَسْقُطُ الأَمْطَارُ كَثِيرًا.</a:t>
@@ -22872,6 +23028,7 @@
                   <a:srgbClr val="1B3B6F"/>
                 </a:solidFill>
                 <a:latin typeface="Amiri" pitchFamily="2" charset="-78"/>
+                <a:ea typeface="Amiri" pitchFamily="2" charset="-78"/>
                 <a:cs typeface="Amiri" pitchFamily="2" charset="-78"/>
               </a:rPr>
               <a:t>كَيْفَ الطَّقْسُ فِي الشِّتَاءِ عِنْدَكُمْ؟</a:t>
@@ -22975,6 +23132,7 @@
                   <a:srgbClr val="1B3B6F"/>
                 </a:solidFill>
                 <a:latin typeface="Amiri" pitchFamily="2" charset="-78"/>
+                <a:ea typeface="Amiri" pitchFamily="2" charset="-78"/>
                 <a:cs typeface="Amiri" pitchFamily="2" charset="-78"/>
               </a:rPr>
               <a:t>يُوجَدُ مَسْجِدٌ، وَتُوجَدُ حَدِيقَةٌ صَغِيرَةٌ.</a:t>
@@ -23051,6 +23209,7 @@
                   <a:srgbClr val="1B3B6F"/>
                 </a:solidFill>
                 <a:latin typeface="Amiri" pitchFamily="2" charset="-78"/>
+                <a:ea typeface="Amiri" pitchFamily="2" charset="-78"/>
                 <a:cs typeface="Amiri" pitchFamily="2" charset="-78"/>
               </a:rPr>
               <a:t>مَاذَا يُوجَدُ قُرْبَ بَيْتِكَ؟</a:t>
@@ -23154,6 +23313,7 @@
                   <a:srgbClr val="1B3B6F"/>
                 </a:solidFill>
                 <a:latin typeface="Amiri" pitchFamily="2" charset="-78"/>
+                <a:ea typeface="Amiri" pitchFamily="2" charset="-78"/>
                 <a:cs typeface="Amiri" pitchFamily="2" charset="-78"/>
               </a:rPr>
               <a:t>أَسْتَخْدِمُهُ ثَلَاثَ سَاعَاتٍ كُلَّ يَوْمٍ.</a:t>
@@ -23230,6 +23390,7 @@
                   <a:srgbClr val="1B3B6F"/>
                 </a:solidFill>
                 <a:latin typeface="Amiri" pitchFamily="2" charset="-78"/>
+                <a:ea typeface="Amiri" pitchFamily="2" charset="-78"/>
                 <a:cs typeface="Amiri" pitchFamily="2" charset="-78"/>
               </a:rPr>
               <a:t>كَمْ سَاعَةً تَسْتَخْدِمُ الإِنْتَرْنِتَ؟</a:t>
@@ -23333,6 +23494,7 @@
                   <a:srgbClr val="1B3B6F"/>
                 </a:solidFill>
                 <a:latin typeface="Amiri" pitchFamily="2" charset="-78"/>
+                <a:ea typeface="Amiri" pitchFamily="2" charset="-78"/>
                 <a:cs typeface="Amiri" pitchFamily="2" charset="-78"/>
               </a:rPr>
               <a:t>أُعِيدُ تَدْوِيرَ البْلَاسْتِيكِ، وَأَمْشِي إِلَى المَدْرَسَةِ.</a:t>
@@ -23409,6 +23571,7 @@
                   <a:srgbClr val="1B3B6F"/>
                 </a:solidFill>
                 <a:latin typeface="Amiri" pitchFamily="2" charset="-78"/>
+                <a:ea typeface="Amiri" pitchFamily="2" charset="-78"/>
                 <a:cs typeface="Amiri" pitchFamily="2" charset="-78"/>
               </a:rPr>
               <a:t>مَاذَا تَفْعَلُ لِحِمَايَةِ البِيئَةِ؟</a:t>
@@ -23618,6 +23781,7 @@
                   <a:srgbClr val="D4AF37"/>
                 </a:solidFill>
                 <a:latin typeface="Amiri" pitchFamily="2" charset="-78"/>
+                <a:ea typeface="Amiri" pitchFamily="2" charset="-78"/>
                 <a:cs typeface="Amiri" pitchFamily="2" charset="-78"/>
               </a:rPr>
               <a:t>م</a:t>
@@ -23938,6 +24102,7 @@
                   <a:srgbClr val="8A6D1E"/>
                 </a:solidFill>
                 <a:latin typeface="Amiri" pitchFamily="2" charset="-78"/>
+                <a:ea typeface="Amiri" pitchFamily="2" charset="-78"/>
                 <a:cs typeface="Amiri" pitchFamily="2" charset="-78"/>
               </a:rPr>
               <a:t>نَمُوذَجُ الإِجَابَةِ</a:t>
@@ -24180,6 +24345,7 @@
                   <a:srgbClr val="1B3B6F"/>
                 </a:solidFill>
                 <a:latin typeface="Amiri" pitchFamily="2" charset="-78"/>
+                <a:ea typeface="Amiri" pitchFamily="2" charset="-78"/>
                 <a:cs typeface="Amiri" pitchFamily="2" charset="-78"/>
               </a:rPr>
               <a:t>زُرْتُ بُحَيْرَةً فِي شَمَالِ وِيلْزَ؛ كَانَتِ الجِبَالُ حَوْلَهَا عَالِيَةً، وَكَانَ المَاءُ صَافِيًا وَبَارِدًا جِدًّا.</a:t>
@@ -24256,6 +24422,7 @@
                   <a:srgbClr val="1B3B6F"/>
                 </a:solidFill>
                 <a:latin typeface="Amiri" pitchFamily="2" charset="-78"/>
+                <a:ea typeface="Amiri" pitchFamily="2" charset="-78"/>
                 <a:cs typeface="Amiri" pitchFamily="2" charset="-78"/>
               </a:rPr>
               <a:t>صِفْ مَكَانًا طَبِيعِيًّا جَمِيلًا زُرْتَهُ.</a:t>
@@ -24359,6 +24526,7 @@
                   <a:srgbClr val="1B3B6F"/>
                 </a:solidFill>
                 <a:latin typeface="Amiri" pitchFamily="2" charset="-78"/>
+                <a:ea typeface="Amiri" pitchFamily="2" charset="-78"/>
                 <a:cs typeface="Amiri" pitchFamily="2" charset="-78"/>
               </a:rPr>
               <a:t>أَكْبَرُ مُشْكِلَةٍ تَلَوُّثُ الهَوَاءِ بِسَبَبِ السَّيَّارَاتِ، لِذٰلِكَ يَنْبَغِي أَنْ تُصْبِحَ الحَافِلَاتُ أَرْخَصَ.</a:t>
@@ -24435,6 +24603,7 @@
                   <a:srgbClr val="1B3B6F"/>
                 </a:solidFill>
                 <a:latin typeface="Amiri" pitchFamily="2" charset="-78"/>
+                <a:ea typeface="Amiri" pitchFamily="2" charset="-78"/>
                 <a:cs typeface="Amiri" pitchFamily="2" charset="-78"/>
               </a:rPr>
               <a:t>مَا أَكْبَرُ مُشْكِلَةٍ بِيئِيَّةٍ فِي مَدِينَتِكَ؟ وَمَا الحَلُّ؟</a:t>
@@ -24538,6 +24707,7 @@
                   <a:srgbClr val="1B3B6F"/>
                 </a:solidFill>
                 <a:latin typeface="Amiri" pitchFamily="2" charset="-78"/>
+                <a:ea typeface="Amiri" pitchFamily="2" charset="-78"/>
                 <a:cs typeface="Amiri" pitchFamily="2" charset="-78"/>
               </a:rPr>
               <a:t>اشْتَرَيْتُ حَقِيبَةَ ظَهْرٍ زَرْقَاءَ مَصْنُوعَةً مِنَ البْلَاسْتِيكِ المُعَادِ تَدْوِيرُهُ، وَكَانَ ثَمَنُهَا خَمْسَةً وَعِشْرِينَ جُنَيْهًا.</a:t>
@@ -24614,6 +24784,7 @@
                   <a:srgbClr val="1B3B6F"/>
                 </a:solidFill>
                 <a:latin typeface="Amiri" pitchFamily="2" charset="-78"/>
+                <a:ea typeface="Amiri" pitchFamily="2" charset="-78"/>
                 <a:cs typeface="Amiri" pitchFamily="2" charset="-78"/>
               </a:rPr>
               <a:t>صِفْ آخِرَ شَيْءٍ اشْتَرَيْتَهُ.</a:t>
@@ -24717,6 +24888,7 @@
                   <a:srgbClr val="1B3B6F"/>
                 </a:solidFill>
                 <a:latin typeface="Amiri" pitchFamily="2" charset="-78"/>
+                <a:ea typeface="Amiri" pitchFamily="2" charset="-78"/>
                 <a:cs typeface="Amiri" pitchFamily="2" charset="-78"/>
               </a:rPr>
               <a:t>أَحْجِزُ التَّذَاكِرَ عَلَى الإِنْتَرْنِتِ، وَأَبْحَثُ عَنِ الطَّرِيقِ فِي تَطْبِيقِ الخَرَائِطِ، فَلَا أَضِيعُ أَبَدًا.</a:t>
@@ -24793,6 +24965,7 @@
                   <a:srgbClr val="1B3B6F"/>
                 </a:solidFill>
                 <a:latin typeface="Amiri" pitchFamily="2" charset="-78"/>
+                <a:ea typeface="Amiri" pitchFamily="2" charset="-78"/>
                 <a:cs typeface="Amiri" pitchFamily="2" charset="-78"/>
               </a:rPr>
               <a:t>كَيْفَ تَسْتَخْدِمُ التِّكْنُولُوجْيَا فِي السَّفَرِ؟</a:t>
@@ -24896,6 +25069,7 @@
                   <a:srgbClr val="1B3B6F"/>
                 </a:solidFill>
                 <a:latin typeface="Amiri" pitchFamily="2" charset="-78"/>
+                <a:ea typeface="Amiri" pitchFamily="2" charset="-78"/>
                 <a:cs typeface="Amiri" pitchFamily="2" charset="-78"/>
               </a:rPr>
               <a:t>سَأَسْكُنُ فِي مَدِينَةٍ صَغِيرَةٍ قُرْبَ البَحْرِ، لِأَنَّهَا أَهْدَأُ مِنَ العَاصِمَةِ، وَفِيهَا كُلُّ الخِدْمَاتِ.</a:t>
@@ -24972,6 +25146,7 @@
                   <a:srgbClr val="1B3B6F"/>
                 </a:solidFill>
                 <a:latin typeface="Amiri" pitchFamily="2" charset="-78"/>
+                <a:ea typeface="Amiri" pitchFamily="2" charset="-78"/>
                 <a:cs typeface="Amiri" pitchFamily="2" charset="-78"/>
               </a:rPr>
               <a:t>أَيْنَ تُحِبُّ أَنْ تَسْكُنَ فِي المُسْتَقْبَلِ؟</a:t>
@@ -25181,6 +25356,7 @@
                   <a:srgbClr val="D4AF37"/>
                 </a:solidFill>
                 <a:latin typeface="Amiri" pitchFamily="2" charset="-78"/>
+                <a:ea typeface="Amiri" pitchFamily="2" charset="-78"/>
                 <a:cs typeface="Amiri" pitchFamily="2" charset="-78"/>
               </a:rPr>
               <a:t>م</a:t>
@@ -25501,6 +25677,7 @@
                   <a:srgbClr val="8A6D1E"/>
                 </a:solidFill>
                 <a:latin typeface="Amiri" pitchFamily="2" charset="-78"/>
+                <a:ea typeface="Amiri" pitchFamily="2" charset="-78"/>
                 <a:cs typeface="Amiri" pitchFamily="2" charset="-78"/>
               </a:rPr>
               <a:t>نَمُوذَجُ الإِجَابَةِ</a:t>
@@ -25743,6 +25920,7 @@
                   <a:srgbClr val="1B3B6F"/>
                 </a:solidFill>
                 <a:latin typeface="Amiri" pitchFamily="2" charset="-78"/>
+                <a:ea typeface="Amiri" pitchFamily="2" charset="-78"/>
                 <a:cs typeface="Amiri" pitchFamily="2" charset="-78"/>
               </a:rPr>
               <a:t>صَحِيحٌ أَنَّ الطَّائِرَاتِ تُلَوِّثُ الجَوَّ كَثِيرًا، غَيْرَ أَنَّ السَّفَرَ يُقَرِّبُ الشُّعُوبَ؛ لِذٰلِكَ أُفَضِّلُ القِطَارَ كُلَّمَا كَانَ مُمْكِنًا.</a:t>
@@ -25819,6 +25997,7 @@
                   <a:srgbClr val="1B3B6F"/>
                 </a:solidFill>
                 <a:latin typeface="Amiri" pitchFamily="2" charset="-78"/>
+                <a:ea typeface="Amiri" pitchFamily="2" charset="-78"/>
                 <a:cs typeface="Amiri" pitchFamily="2" charset="-78"/>
               </a:rPr>
               <a:t>هَلْ يَجِبُ أَنْ نُسَافِرَ أَقَلَّ لِنَحْمِيَ البِيئَةَ؟</a:t>
@@ -25922,6 +26101,7 @@
                   <a:srgbClr val="1B3B6F"/>
                 </a:solidFill>
                 <a:latin typeface="Amiri" pitchFamily="2" charset="-78"/>
+                <a:ea typeface="Amiri" pitchFamily="2" charset="-78"/>
                 <a:cs typeface="Amiri" pitchFamily="2" charset="-78"/>
               </a:rPr>
               <a:t>كَانَ وَالِدَايَ يَكْتُبَانِ الرَّسَائِلَ وَيَشْتَرِيَانِ مِنَ السُّوقِ، أَمَّا اليَوْمَ فَنَفْعَلُ كُلَّ شَيْءٍ بِالهَاتِفِ، لٰكِنَّ الصَّيْفَ أَصْبَحَ أَحَرَّ.</a:t>
@@ -25998,6 +26178,7 @@
                   <a:srgbClr val="1B3B6F"/>
                 </a:solidFill>
                 <a:latin typeface="Amiri" pitchFamily="2" charset="-78"/>
+                <a:ea typeface="Amiri" pitchFamily="2" charset="-78"/>
                 <a:cs typeface="Amiri" pitchFamily="2" charset="-78"/>
               </a:rPr>
               <a:t>كَيْفَ تَغَيَّرَ العَالَمُ مُنْذُ طُفُولَةِ وَالِدَيْكَ؟</a:t>
@@ -26101,6 +26282,7 @@
                   <a:srgbClr val="1B3B6F"/>
                 </a:solidFill>
                 <a:latin typeface="Amiri" pitchFamily="2" charset="-78"/>
+                <a:ea typeface="Amiri" pitchFamily="2" charset="-78"/>
                 <a:cs typeface="Amiri" pitchFamily="2" charset="-78"/>
               </a:rPr>
               <a:t>أَرَى أَنَّ المَسْؤُولِيَّةَ مُشْتَرَكَةٌ: يَجِبُ عَلَى البَلَدِيَّاتِ أَنْ تَبْنِيَ حَدَائِقَ وَمَمَرَّاتٍ لِلدَّرَّاجَاتِ، وَعَلَى السُّكَّانِ أَنْ يَسْتَخْدِمُوهَا.</a:t>
@@ -26177,6 +26359,7 @@
                   <a:srgbClr val="1B3B6F"/>
                 </a:solidFill>
                 <a:latin typeface="Amiri" pitchFamily="2" charset="-78"/>
+                <a:ea typeface="Amiri" pitchFamily="2" charset="-78"/>
                 <a:cs typeface="Amiri" pitchFamily="2" charset="-78"/>
               </a:rPr>
               <a:t>مَنِ المَسْؤُولُ عَنْ مُسْتَقْبَلِ المُدُنِ؟</a:t>
@@ -26386,6 +26569,7 @@
                   <a:srgbClr val="D4AF37"/>
                 </a:solidFill>
                 <a:latin typeface="Amiri" pitchFamily="2" charset="-78"/>
+                <a:ea typeface="Amiri" pitchFamily="2" charset="-78"/>
                 <a:cs typeface="Amiri" pitchFamily="2" charset="-78"/>
               </a:rPr>
               <a:t>م</a:t>
@@ -26706,6 +26890,7 @@
                   <a:srgbClr val="8A6D1E"/>
                 </a:solidFill>
                 <a:latin typeface="Amiri" pitchFamily="2" charset="-78"/>
+                <a:ea typeface="Amiri" pitchFamily="2" charset="-78"/>
                 <a:cs typeface="Amiri" pitchFamily="2" charset="-78"/>
               </a:rPr>
               <a:t>نَمُوذَجُ الإِجَابَةِ</a:t>
@@ -26948,6 +27133,7 @@
                   <a:srgbClr val="1B3B6F"/>
                 </a:solidFill>
                 <a:latin typeface="Amiri" pitchFamily="2" charset="-78"/>
+                <a:ea typeface="Amiri" pitchFamily="2" charset="-78"/>
                 <a:cs typeface="Amiri" pitchFamily="2" charset="-78"/>
               </a:rPr>
               <a:t>مِنْ نَاحِيَةٍ، يُتِيحُ مُقَارَنَةَ الأَسْعَارِ بِسُرْعَةٍ، وَمِنْ نَاحِيَةٍ أُخْرَى، يُشَجِّعُ عَلَى شِرَاءِ أَشْيَاءَ لَا نَحْتَاجُ إِلَيْهَا.</a:t>
@@ -27024,6 +27210,7 @@
                   <a:srgbClr val="1B3B6F"/>
                 </a:solidFill>
                 <a:latin typeface="Amiri" pitchFamily="2" charset="-78"/>
+                <a:ea typeface="Amiri" pitchFamily="2" charset="-78"/>
                 <a:cs typeface="Amiri" pitchFamily="2" charset="-78"/>
               </a:rPr>
               <a:t>هَلِ التَّسَوُّقُ عَلَى الإِنْتَرْنِتِ يُفِيدُ المُسْتَهْلِكَ؟</a:t>
@@ -27127,6 +27314,7 @@
                   <a:srgbClr val="1B3B6F"/>
                 </a:solidFill>
                 <a:latin typeface="Amiri" pitchFamily="2" charset="-78"/>
+                <a:ea typeface="Amiri" pitchFamily="2" charset="-78"/>
                 <a:cs typeface="Amiri" pitchFamily="2" charset="-78"/>
               </a:rPr>
               <a:t>لَوْ صَمَّمْتُهَا، لَجَعَلْتُهَا مَبْنِيَّةً مِنَ الخَشَبِ وَالزُّجَاجِ، بِأَلْوَاحٍ شَمْسِيَّةٍ، وَحَدِيقَةٍ يَزْرَعُ فِيهَا الطُّلَّابُ طَعَامَهُمْ.</a:t>
@@ -27203,6 +27391,7 @@
                   <a:srgbClr val="1B3B6F"/>
                 </a:solidFill>
                 <a:latin typeface="Amiri" pitchFamily="2" charset="-78"/>
+                <a:ea typeface="Amiri" pitchFamily="2" charset="-78"/>
                 <a:cs typeface="Amiri" pitchFamily="2" charset="-78"/>
               </a:rPr>
               <a:t>لَوْ صَمَّمْتَ مَدْرَسَةَ المُسْتَقْبَلِ، كَيْفَ تَكُونُ؟</a:t>
@@ -27412,6 +27601,7 @@
                   <a:srgbClr val="D4AF37"/>
                 </a:solidFill>
                 <a:latin typeface="Amiri" pitchFamily="2" charset="-78"/>
+                <a:ea typeface="Amiri" pitchFamily="2" charset="-78"/>
                 <a:cs typeface="Amiri" pitchFamily="2" charset="-78"/>
               </a:rPr>
               <a:t>م</a:t>
@@ -27732,6 +27922,7 @@
                   <a:srgbClr val="8A6D1E"/>
                 </a:solidFill>
                 <a:latin typeface="Amiri" pitchFamily="2" charset="-78"/>
+                <a:ea typeface="Amiri" pitchFamily="2" charset="-78"/>
                 <a:cs typeface="Amiri" pitchFamily="2" charset="-78"/>
               </a:rPr>
               <a:t>قَيِّمْ عَمَلَكَ</a:t>
@@ -28976,6 +29167,7 @@
                   <a:srgbClr val="FFFFFF"/>
                 </a:solidFill>
                 <a:latin typeface="Amiri" pitchFamily="2" charset="-78"/>
+                <a:ea typeface="Amiri" pitchFamily="2" charset="-78"/>
                 <a:cs typeface="Amiri" pitchFamily="2" charset="-78"/>
               </a:rPr>
               <a:t>أَحْسَنْتُمْ! إِلَى اللِّقَاءِ</a:t>
@@ -29128,6 +29320,7 @@
                   <a:srgbClr val="D4AF37"/>
                 </a:solidFill>
                 <a:latin typeface="Amiri" pitchFamily="2" charset="-78"/>
+                <a:ea typeface="Amiri" pitchFamily="2" charset="-78"/>
                 <a:cs typeface="Amiri" pitchFamily="2" charset="-78"/>
               </a:rPr>
               <a:t>وَرْشَةُ الكِتَابَةِ</a:t>
@@ -29261,6 +29454,7 @@
                   <a:srgbClr val="D4AF37"/>
                 </a:solidFill>
                 <a:latin typeface="Amiri" pitchFamily="2" charset="-78"/>
+                <a:ea typeface="Amiri" pitchFamily="2" charset="-78"/>
                 <a:cs typeface="Amiri" pitchFamily="2" charset="-78"/>
               </a:rPr>
               <a:t>م</a:t>
@@ -29581,6 +29775,7 @@
                   <a:srgbClr val="8A6D1E"/>
                 </a:solidFill>
                 <a:latin typeface="Amiri" pitchFamily="2" charset="-78"/>
+                <a:ea typeface="Amiri" pitchFamily="2" charset="-78"/>
                 <a:cs typeface="Amiri" pitchFamily="2" charset="-78"/>
               </a:rPr>
               <a:t>خَرِيطَةُ الوَرْشَةِ</a:t>
@@ -29895,6 +30090,7 @@
                   <a:srgbClr val="1B3B6F"/>
                 </a:solidFill>
                 <a:latin typeface="Amiri" pitchFamily="2" charset="-78"/>
+                <a:ea typeface="Amiri" pitchFamily="2" charset="-78"/>
                 <a:cs typeface="Amiri" pitchFamily="2" charset="-78"/>
               </a:rPr>
               <a:t>كَيْفَ</a:t>
@@ -30171,6 +30367,7 @@
                   <a:srgbClr val="1E6B52"/>
                 </a:solidFill>
                 <a:latin typeface="Amiri" pitchFamily="2" charset="-78"/>
+                <a:ea typeface="Amiri" pitchFamily="2" charset="-78"/>
                 <a:cs typeface="Amiri" pitchFamily="2" charset="-78"/>
               </a:rPr>
               <a:t>تَمْثِيلُ الدَّوْرِ</a:t>
@@ -30447,6 +30644,7 @@
                   <a:srgbClr val="8A6D1E"/>
                 </a:solidFill>
                 <a:latin typeface="Amiri" pitchFamily="2" charset="-78"/>
+                <a:ea typeface="Amiri" pitchFamily="2" charset="-78"/>
                 <a:cs typeface="Amiri" pitchFamily="2" charset="-78"/>
               </a:rPr>
               <a:t>النَّمُوذَجُ</a:t>
@@ -30723,6 +30921,7 @@
                   <a:srgbClr val="1E6B52"/>
                 </a:solidFill>
                 <a:latin typeface="Amiri" pitchFamily="2" charset="-78"/>
+                <a:ea typeface="Amiri" pitchFamily="2" charset="-78"/>
                 <a:cs typeface="Amiri" pitchFamily="2" charset="-78"/>
               </a:rPr>
               <a:t>المُحَادَثَةُ</a:t>
@@ -30999,6 +31198,7 @@
                   <a:srgbClr val="8A6D1E"/>
                 </a:solidFill>
                 <a:latin typeface="Amiri" pitchFamily="2" charset="-78"/>
+                <a:ea typeface="Amiri" pitchFamily="2" charset="-78"/>
                 <a:cs typeface="Amiri" pitchFamily="2" charset="-78"/>
               </a:rPr>
               <a:t>قَيِّمْ</a:t>
@@ -31242,6 +31442,7 @@
                   <a:srgbClr val="D4AF37"/>
                 </a:solidFill>
                 <a:latin typeface="Amiri" pitchFamily="2" charset="-78"/>
+                <a:ea typeface="Amiri" pitchFamily="2" charset="-78"/>
                 <a:cs typeface="Amiri" pitchFamily="2" charset="-78"/>
               </a:rPr>
               <a:t>م</a:t>
@@ -31562,6 +31763,7 @@
                   <a:srgbClr val="8A6D1E"/>
                 </a:solidFill>
                 <a:latin typeface="Amiri" pitchFamily="2" charset="-78"/>
+                <a:ea typeface="Amiri" pitchFamily="2" charset="-78"/>
                 <a:cs typeface="Amiri" pitchFamily="2" charset="-78"/>
               </a:rPr>
               <a:t>امْتِحَانُ التَّحَدُّثِ</a:t>
@@ -32186,6 +32388,7 @@
                   <a:srgbClr val="1B3B6F"/>
                 </a:solidFill>
                 <a:latin typeface="Amiri" pitchFamily="2" charset="-78"/>
+                <a:ea typeface="Amiri" pitchFamily="2" charset="-78"/>
                 <a:cs typeface="Amiri" pitchFamily="2" charset="-78"/>
               </a:rPr>
               <a:t>عَفْوًا، هَلْ يُمْكِنُ أَنْ تُعِيدَ السُّؤَالَ؟</a:t>
@@ -32285,6 +32488,7 @@
                   <a:srgbClr val="1B3B6F"/>
                 </a:solidFill>
                 <a:latin typeface="Amiri" pitchFamily="2" charset="-78"/>
+                <a:ea typeface="Amiri" pitchFamily="2" charset="-78"/>
                 <a:cs typeface="Amiri" pitchFamily="2" charset="-78"/>
               </a:rPr>
               <a:t>لَحْظَةً، دَعْنِي أُفَكِّرُ …</a:t>
@@ -32384,6 +32588,7 @@
                   <a:srgbClr val="1B3B6F"/>
                 </a:solidFill>
                 <a:latin typeface="Amiri" pitchFamily="2" charset="-78"/>
+                <a:ea typeface="Amiri" pitchFamily="2" charset="-78"/>
                 <a:cs typeface="Amiri" pitchFamily="2" charset="-78"/>
               </a:rPr>
               <a:t>أَقْصِدُ …</a:t>
@@ -32555,6 +32760,7 @@
                   <a:srgbClr val="D4AF37"/>
                 </a:solidFill>
                 <a:latin typeface="Amiri" pitchFamily="2" charset="-78"/>
+                <a:ea typeface="Amiri" pitchFamily="2" charset="-78"/>
                 <a:cs typeface="Amiri" pitchFamily="2" charset="-78"/>
               </a:rPr>
               <a:t>م</a:t>
@@ -32875,6 +33081,7 @@
                   <a:srgbClr val="8A6D1E"/>
                 </a:solidFill>
                 <a:latin typeface="Amiri" pitchFamily="2" charset="-78"/>
+                <a:ea typeface="Amiri" pitchFamily="2" charset="-78"/>
                 <a:cs typeface="Amiri" pitchFamily="2" charset="-78"/>
               </a:rPr>
               <a:t>المِحْوَرُ ج فِي اثْنَتَيْ عَشْرَةَ بِنْيَةً</a:t>
@@ -33178,6 +33385,7 @@
                   <a:srgbClr val="1B3B6F"/>
                 </a:solidFill>
                 <a:latin typeface="Amiri" pitchFamily="2" charset="-78"/>
+                <a:ea typeface="Amiri" pitchFamily="2" charset="-78"/>
                 <a:cs typeface="Amiri" pitchFamily="2" charset="-78"/>
               </a:rPr>
               <a:t>يَقَعُ · تَقَعُ فِي …</a:t>
@@ -33335,6 +33543,7 @@
                   <a:srgbClr val="1B3B6F"/>
                 </a:solidFill>
                 <a:latin typeface="Amiri" pitchFamily="2" charset="-78"/>
+                <a:ea typeface="Amiri" pitchFamily="2" charset="-78"/>
                 <a:cs typeface="Amiri" pitchFamily="2" charset="-78"/>
               </a:rPr>
               <a:t>مِصْرِيٌّ · مِصْرِيَّةٌ</a:t>
@@ -33438,6 +33647,7 @@
                   <a:srgbClr val="1B3B6F"/>
                 </a:solidFill>
                 <a:latin typeface="Amiri" pitchFamily="2" charset="-78"/>
+                <a:ea typeface="Amiri" pitchFamily="2" charset="-78"/>
                 <a:cs typeface="Amiri" pitchFamily="2" charset="-78"/>
               </a:rPr>
               <a:t>فِي شَمَالِ</a:t>
@@ -33703,6 +33913,7 @@
                   <a:srgbClr val="1B3B6F"/>
                 </a:solidFill>
                 <a:latin typeface="Amiri" pitchFamily="2" charset="-78"/>
+                <a:ea typeface="Amiri" pitchFamily="2" charset="-78"/>
                 <a:cs typeface="Amiri" pitchFamily="2" charset="-78"/>
               </a:rPr>
               <a:t>جِبَالٌ عَالِيَةٌ</a:t>
@@ -33860,6 +34071,7 @@
                   <a:srgbClr val="1B3B6F"/>
                 </a:solidFill>
                 <a:latin typeface="Amiri" pitchFamily="2" charset="-78"/>
+                <a:ea typeface="Amiri" pitchFamily="2" charset="-78"/>
                 <a:cs typeface="Amiri" pitchFamily="2" charset="-78"/>
               </a:rPr>
               <a:t>تَعِيشُ</a:t>
@@ -33963,6 +34175,7 @@
                   <a:srgbClr val="1B3B6F"/>
                 </a:solidFill>
                 <a:latin typeface="Amiri" pitchFamily="2" charset="-78"/>
+                <a:ea typeface="Amiri" pitchFamily="2" charset="-78"/>
                 <a:cs typeface="Amiri" pitchFamily="2" charset="-78"/>
               </a:rPr>
               <a:t>غَابَاتٌ كَثِيفَةٌ</a:t>
@@ -34228,6 +34441,7 @@
                   <a:srgbClr val="1B3B6F"/>
                 </a:solidFill>
                 <a:latin typeface="Amiri" pitchFamily="2" charset="-78"/>
+                <a:ea typeface="Amiri" pitchFamily="2" charset="-78"/>
                 <a:cs typeface="Amiri" pitchFamily="2" charset="-78"/>
               </a:rPr>
               <a:t>تَسْقُطُ الأَمْطَارُ</a:t>
@@ -34385,6 +34599,7 @@
                   <a:srgbClr val="1B3B6F"/>
                 </a:solidFill>
                 <a:latin typeface="Amiri" pitchFamily="2" charset="-78"/>
+                <a:ea typeface="Amiri" pitchFamily="2" charset="-78"/>
                 <a:cs typeface="Amiri" pitchFamily="2" charset="-78"/>
               </a:rPr>
               <a:t>سَيَكُونُ الجَوُّ …</a:t>
@@ -34488,6 +34703,7 @@
                   <a:srgbClr val="1B3B6F"/>
                 </a:solidFill>
                 <a:latin typeface="Amiri" pitchFamily="2" charset="-78"/>
+                <a:ea typeface="Amiri" pitchFamily="2" charset="-78"/>
                 <a:cs typeface="Amiri" pitchFamily="2" charset="-78"/>
               </a:rPr>
               <a:t>أَبْرَدُ مِنْ</a:t>
@@ -34753,6 +34969,7 @@
                   <a:srgbClr val="1B3B6F"/>
                 </a:solidFill>
                 <a:latin typeface="Amiri" pitchFamily="2" charset="-78"/>
+                <a:ea typeface="Amiri" pitchFamily="2" charset="-78"/>
                 <a:cs typeface="Amiri" pitchFamily="2" charset="-78"/>
               </a:rPr>
               <a:t>بِسَبَبِ … مِمَّا يُسَبِّبُ …</a:t>
@@ -34910,6 +35127,7 @@
                   <a:srgbClr val="1B3B6F"/>
                 </a:solidFill>
                 <a:latin typeface="Amiri" pitchFamily="2" charset="-78"/>
+                <a:ea typeface="Amiri" pitchFamily="2" charset="-78"/>
                 <a:cs typeface="Amiri" pitchFamily="2" charset="-78"/>
               </a:rPr>
               <a:t>تُرْمَى · يُلَوَّثُ</a:t>
@@ -35013,6 +35231,7 @@
                   <a:srgbClr val="1B3B6F"/>
                 </a:solidFill>
                 <a:latin typeface="Amiri" pitchFamily="2" charset="-78"/>
+                <a:ea typeface="Amiri" pitchFamily="2" charset="-78"/>
                 <a:cs typeface="Amiri" pitchFamily="2" charset="-78"/>
               </a:rPr>
               <a:t>يُؤَدِّي إِلَى</a:t>
@@ -35278,6 +35497,7 @@
                   <a:srgbClr val="1B3B6F"/>
                 </a:solidFill>
                 <a:latin typeface="Amiri" pitchFamily="2" charset="-78"/>
+                <a:ea typeface="Amiri" pitchFamily="2" charset="-78"/>
                 <a:cs typeface="Amiri" pitchFamily="2" charset="-78"/>
               </a:rPr>
               <a:t>يَجِبُ عَلَى … أَنْ</a:t>
@@ -35435,6 +35655,7 @@
                   <a:srgbClr val="1B3B6F"/>
                 </a:solidFill>
                 <a:latin typeface="Amiri" pitchFamily="2" charset="-78"/>
+                <a:ea typeface="Amiri" pitchFamily="2" charset="-78"/>
                 <a:cs typeface="Amiri" pitchFamily="2" charset="-78"/>
               </a:rPr>
               <a:t>لِكَيْ</a:t>
@@ -35538,6 +35759,7 @@
                   <a:srgbClr val="1B3B6F"/>
                 </a:solidFill>
                 <a:latin typeface="Amiri" pitchFamily="2" charset="-78"/>
+                <a:ea typeface="Amiri" pitchFamily="2" charset="-78"/>
                 <a:cs typeface="Amiri" pitchFamily="2" charset="-78"/>
               </a:rPr>
               <a:t>يَنْبَغِي أَنْ</a:t>
@@ -35803,6 +36025,7 @@
                   <a:srgbClr val="1B3B6F"/>
                 </a:solidFill>
                 <a:latin typeface="Amiri" pitchFamily="2" charset="-78"/>
+                <a:ea typeface="Amiri" pitchFamily="2" charset="-78"/>
                 <a:cs typeface="Amiri" pitchFamily="2" charset="-78"/>
               </a:rPr>
               <a:t>أَتَوَاصَلُ مَعَ …</a:t>
@@ -35960,6 +36183,7 @@
                   <a:srgbClr val="1B3B6F"/>
                 </a:solidFill>
                 <a:latin typeface="Amiri" pitchFamily="2" charset="-78"/>
+                <a:ea typeface="Amiri" pitchFamily="2" charset="-78"/>
                 <a:cs typeface="Amiri" pitchFamily="2" charset="-78"/>
               </a:rPr>
               <a:t>أَبْحَثُ عَنْ</a:t>
@@ -36063,6 +36287,7 @@
                   <a:srgbClr val="1B3B6F"/>
                 </a:solidFill>
                 <a:latin typeface="Amiri" pitchFamily="2" charset="-78"/>
+                <a:ea typeface="Amiri" pitchFamily="2" charset="-78"/>
                 <a:cs typeface="Amiri" pitchFamily="2" charset="-78"/>
               </a:rPr>
               <a:t>أُعَلِّقُ عَلَى</a:t>
@@ -36196,6 +36421,7 @@
                   <a:srgbClr val="D4AF37"/>
                 </a:solidFill>
                 <a:latin typeface="Amiri" pitchFamily="2" charset="-78"/>
+                <a:ea typeface="Amiri" pitchFamily="2" charset="-78"/>
                 <a:cs typeface="Amiri" pitchFamily="2" charset="-78"/>
               </a:rPr>
               <a:t>م</a:t>
@@ -36516,6 +36742,7 @@
                   <a:srgbClr val="8A6D1E"/>
                 </a:solidFill>
                 <a:latin typeface="Amiri" pitchFamily="2" charset="-78"/>
+                <a:ea typeface="Amiri" pitchFamily="2" charset="-78"/>
                 <a:cs typeface="Amiri" pitchFamily="2" charset="-78"/>
               </a:rPr>
               <a:t>بِنْيَاتٌ تَرْفَعُ الدَّرَجَةَ</a:t>
@@ -36819,6 +37046,7 @@
                   <a:srgbClr val="1B3B6F"/>
                 </a:solidFill>
                 <a:latin typeface="Amiri" pitchFamily="2" charset="-78"/>
+                <a:ea typeface="Amiri" pitchFamily="2" charset="-78"/>
                 <a:cs typeface="Amiri" pitchFamily="2" charset="-78"/>
               </a:rPr>
               <a:t>حَجَزْتُ · سَأَحْجِزُ</a:t>
@@ -36976,6 +37204,7 @@
                   <a:srgbClr val="1B3B6F"/>
                 </a:solidFill>
                 <a:latin typeface="Amiri" pitchFamily="2" charset="-78"/>
+                <a:ea typeface="Amiri" pitchFamily="2" charset="-78"/>
                 <a:cs typeface="Amiri" pitchFamily="2" charset="-78"/>
               </a:rPr>
               <a:t>أُرْسِلَ</a:t>
@@ -37079,6 +37308,7 @@
                   <a:srgbClr val="1B3B6F"/>
                 </a:solidFill>
                 <a:latin typeface="Amiri" pitchFamily="2" charset="-78"/>
+                <a:ea typeface="Amiri" pitchFamily="2" charset="-78"/>
                 <a:cs typeface="Amiri" pitchFamily="2" charset="-78"/>
               </a:rPr>
               <a:t>أُقِيمُ فِي</a:t>
@@ -37344,6 +37574,7 @@
                   <a:srgbClr val="1B3B6F"/>
                 </a:solidFill>
                 <a:latin typeface="Amiri" pitchFamily="2" charset="-78"/>
+                <a:ea typeface="Amiri" pitchFamily="2" charset="-78"/>
                 <a:cs typeface="Amiri" pitchFamily="2" charset="-78"/>
               </a:rPr>
               <a:t>يُوجَدُ · تُوجَدُ</a:t>
@@ -37501,6 +37732,7 @@
                   <a:srgbClr val="1B3B6F"/>
                 </a:solidFill>
                 <a:latin typeface="Amiri" pitchFamily="2" charset="-78"/>
+                <a:ea typeface="Amiri" pitchFamily="2" charset="-78"/>
                 <a:cs typeface="Amiri" pitchFamily="2" charset="-78"/>
               </a:rPr>
               <a:t>مَبْنِيٌّ مِنْ</a:t>
@@ -37604,6 +37836,7 @@
                   <a:srgbClr val="1B3B6F"/>
                 </a:solidFill>
                 <a:latin typeface="Amiri" pitchFamily="2" charset="-78"/>
+                <a:ea typeface="Amiri" pitchFamily="2" charset="-78"/>
                 <a:cs typeface="Amiri" pitchFamily="2" charset="-78"/>
               </a:rPr>
               <a:t>مُقَابِلَ</a:t>
@@ -37869,6 +38102,7 @@
                   <a:srgbClr val="1B3B6F"/>
                 </a:solidFill>
                 <a:latin typeface="Amiri" pitchFamily="2" charset="-78"/>
+                <a:ea typeface="Amiri" pitchFamily="2" charset="-78"/>
                 <a:cs typeface="Amiri" pitchFamily="2" charset="-78"/>
               </a:rPr>
               <a:t>كَمْ ثَمَنُهُ / ثَمَنُهَا؟</a:t>
@@ -38026,6 +38260,7 @@
                   <a:srgbClr val="1B3B6F"/>
                 </a:solidFill>
                 <a:latin typeface="Amiri" pitchFamily="2" charset="-78"/>
+                <a:ea typeface="Amiri" pitchFamily="2" charset="-78"/>
                 <a:cs typeface="Amiri" pitchFamily="2" charset="-78"/>
               </a:rPr>
               <a:t>عِشْرُونَ جُنَيْهًا</a:t>
@@ -38129,6 +38364,7 @@
                   <a:srgbClr val="1B3B6F"/>
                 </a:solidFill>
                 <a:latin typeface="Amiri" pitchFamily="2" charset="-78"/>
+                <a:ea typeface="Amiri" pitchFamily="2" charset="-78"/>
                 <a:cs typeface="Amiri" pitchFamily="2" charset="-78"/>
               </a:rPr>
               <a:t>أَرْخَصُ</a:t>
@@ -38394,6 +38630,7 @@
                   <a:srgbClr val="1B3B6F"/>
                 </a:solidFill>
                 <a:latin typeface="Amiri" pitchFamily="2" charset="-78"/>
+                <a:ea typeface="Amiri" pitchFamily="2" charset="-78"/>
                 <a:cs typeface="Amiri" pitchFamily="2" charset="-78"/>
               </a:rPr>
               <a:t>طُولُهُ مِتْرَانِ</a:t>
@@ -38551,6 +38788,7 @@
                   <a:srgbClr val="1B3B6F"/>
                 </a:solidFill>
                 <a:latin typeface="Amiri" pitchFamily="2" charset="-78"/>
+                <a:ea typeface="Amiri" pitchFamily="2" charset="-78"/>
                 <a:cs typeface="Amiri" pitchFamily="2" charset="-78"/>
               </a:rPr>
               <a:t>دَائِرِيَّةٌ</a:t>
@@ -38654,6 +38892,7 @@
                   <a:srgbClr val="1B3B6F"/>
                 </a:solidFill>
                 <a:latin typeface="Amiri" pitchFamily="2" charset="-78"/>
+                <a:ea typeface="Amiri" pitchFamily="2" charset="-78"/>
                 <a:cs typeface="Amiri" pitchFamily="2" charset="-78"/>
               </a:rPr>
               <a:t>مَصْنُوعَةٌ مِنْ</a:t>
@@ -38919,6 +39158,7 @@
                   <a:srgbClr val="1B3B6F"/>
                 </a:solidFill>
                 <a:latin typeface="Amiri" pitchFamily="2" charset="-78"/>
+                <a:ea typeface="Amiri" pitchFamily="2" charset="-78"/>
                 <a:cs typeface="Amiri" pitchFamily="2" charset="-78"/>
               </a:rPr>
               <a:t>أَوَّلًا · بِالإِضَافَةِ إِلَى ذٰلِكَ</a:t>
@@ -39076,6 +39316,7 @@
                   <a:srgbClr val="1B3B6F"/>
                 </a:solidFill>
                 <a:latin typeface="Amiri" pitchFamily="2" charset="-78"/>
+                <a:ea typeface="Amiri" pitchFamily="2" charset="-78"/>
                 <a:cs typeface="Amiri" pitchFamily="2" charset="-78"/>
               </a:rPr>
               <a:t>لِذٰلِكَ</a:t>
@@ -39179,6 +39420,7 @@
                   <a:srgbClr val="1B3B6F"/>
                 </a:solidFill>
                 <a:latin typeface="Amiri" pitchFamily="2" charset="-78"/>
+                <a:ea typeface="Amiri" pitchFamily="2" charset="-78"/>
                 <a:cs typeface="Amiri" pitchFamily="2" charset="-78"/>
               </a:rPr>
               <a:t>مَعَ ذٰلِكَ</a:t>
@@ -39444,6 +39686,7 @@
                   <a:srgbClr val="1B3B6F"/>
                 </a:solidFill>
                 <a:latin typeface="Amiri" pitchFamily="2" charset="-78"/>
+                <a:ea typeface="Amiri" pitchFamily="2" charset="-78"/>
                 <a:cs typeface="Amiri" pitchFamily="2" charset="-78"/>
               </a:rPr>
               <a:t>صَحِيحٌ أَنَّ … غَيْرَ أَنَّ …</a:t>
@@ -39601,6 +39844,7 @@
                   <a:srgbClr val="1B3B6F"/>
                 </a:solidFill>
                 <a:latin typeface="Amiri" pitchFamily="2" charset="-78"/>
+                <a:ea typeface="Amiri" pitchFamily="2" charset="-78"/>
                 <a:cs typeface="Amiri" pitchFamily="2" charset="-78"/>
               </a:rPr>
               <a:t>إِذَا … فَسَوْفَ</a:t>
@@ -39704,6 +39948,7 @@
                   <a:srgbClr val="1B3B6F"/>
                 </a:solidFill>
                 <a:latin typeface="Amiri" pitchFamily="2" charset="-78"/>
+                <a:ea typeface="Amiri" pitchFamily="2" charset="-78"/>
                 <a:cs typeface="Amiri" pitchFamily="2" charset="-78"/>
               </a:rPr>
               <a:t>لَوْ كُنْتُ … لَاخْتَرْتُ</a:t>
@@ -39837,6 +40082,7 @@
                   <a:srgbClr val="D4AF37"/>
                 </a:solidFill>
                 <a:latin typeface="Amiri" pitchFamily="2" charset="-78"/>
+                <a:ea typeface="Amiri" pitchFamily="2" charset="-78"/>
                 <a:cs typeface="Amiri" pitchFamily="2" charset="-78"/>
               </a:rPr>
               <a:t>م</a:t>
@@ -40157,6 +40403,7 @@
                   <a:srgbClr val="8A6D1E"/>
                 </a:solidFill>
                 <a:latin typeface="Amiri" pitchFamily="2" charset="-78"/>
+                <a:ea typeface="Amiri" pitchFamily="2" charset="-78"/>
                 <a:cs typeface="Amiri" pitchFamily="2" charset="-78"/>
               </a:rPr>
               <a:t>فِي الغُرَفِ</a:t>
@@ -41333,6 +41580,7 @@
                   <a:srgbClr val="1B3B6F"/>
                 </a:solidFill>
                 <a:latin typeface="Amiri" pitchFamily="2" charset="-78"/>
+                <a:ea typeface="Amiri" pitchFamily="2" charset="-78"/>
                 <a:cs typeface="Amiri" pitchFamily="2" charset="-78"/>
               </a:rPr>
               <a:t>دَوْرُكَ!</a:t>
@@ -41409,6 +41657,7 @@
                   <a:srgbClr val="1B3B6F"/>
                 </a:solidFill>
                 <a:latin typeface="Amiri" pitchFamily="2" charset="-78"/>
+                <a:ea typeface="Amiri" pitchFamily="2" charset="-78"/>
                 <a:cs typeface="Amiri" pitchFamily="2" charset="-78"/>
               </a:rPr>
               <a:t>أَحْسَنْتَ! / أَحْسَنْتِ!</a:t>
@@ -41485,6 +41734,7 @@
                   <a:srgbClr val="1B3B6F"/>
                 </a:solidFill>
                 <a:latin typeface="Amiri" pitchFamily="2" charset="-78"/>
+                <a:ea typeface="Amiri" pitchFamily="2" charset="-78"/>
                 <a:cs typeface="Amiri" pitchFamily="2" charset="-78"/>
               </a:rPr>
               <a:t>تَكَلَّمْ أَكْثَرَ، مِنْ فَضْلِكَ</a:t>
@@ -41561,6 +41811,7 @@
                   <a:srgbClr val="1B3B6F"/>
                 </a:solidFill>
                 <a:latin typeface="Amiri" pitchFamily="2" charset="-78"/>
+                <a:ea typeface="Amiri" pitchFamily="2" charset="-78"/>
                 <a:cs typeface="Amiri" pitchFamily="2" charset="-78"/>
               </a:rPr>
               <a:t>لِمَاذَا؟</a:t>
@@ -41732,6 +41983,7 @@
                   <a:srgbClr val="D4AF37"/>
                 </a:solidFill>
                 <a:latin typeface="Amiri" pitchFamily="2" charset="-78"/>
+                <a:ea typeface="Amiri" pitchFamily="2" charset="-78"/>
                 <a:cs typeface="Amiri" pitchFamily="2" charset="-78"/>
               </a:rPr>
               <a:t>م</a:t>
@@ -42052,6 +42304,7 @@
                   <a:srgbClr val="8A6D1E"/>
                 </a:solidFill>
                 <a:latin typeface="Amiri" pitchFamily="2" charset="-78"/>
+                <a:ea typeface="Amiri" pitchFamily="2" charset="-78"/>
                 <a:cs typeface="Amiri" pitchFamily="2" charset="-78"/>
               </a:rPr>
               <a:t>فِي مَحَطَّةِ القِطَارِ</a:t>
@@ -42332,6 +42585,7 @@
                   <a:srgbClr val="1B3B6F"/>
                 </a:solidFill>
                 <a:latin typeface="Amiri" pitchFamily="2" charset="-78"/>
+                <a:ea typeface="Amiri" pitchFamily="2" charset="-78"/>
                 <a:cs typeface="Amiri" pitchFamily="2" charset="-78"/>
               </a:rPr>
               <a:t>أُرِيدُ أَنْ أُسَافِرَ إِلَى …</a:t>
@@ -42408,6 +42662,7 @@
                   <a:srgbClr val="1B3B6F"/>
                 </a:solidFill>
                 <a:latin typeface="Amiri" pitchFamily="2" charset="-78"/>
+                <a:ea typeface="Amiri" pitchFamily="2" charset="-78"/>
                 <a:cs typeface="Amiri" pitchFamily="2" charset="-78"/>
               </a:rPr>
               <a:t>صَبَاحَ الخَيْرِ، إِلَى أَيْنَ؟</a:t>
@@ -42576,6 +42831,7 @@
                   <a:srgbClr val="1B3B6F"/>
                 </a:solidFill>
                 <a:latin typeface="Amiri" pitchFamily="2" charset="-78"/>
+                <a:ea typeface="Amiri" pitchFamily="2" charset="-78"/>
                 <a:cs typeface="Amiri" pitchFamily="2" charset="-78"/>
               </a:rPr>
               <a:t>أُرِيدُ … تَذَاكِرَ</a:t>
@@ -42652,6 +42908,7 @@
                   <a:srgbClr val="1B3B6F"/>
                 </a:solidFill>
                 <a:latin typeface="Amiri" pitchFamily="2" charset="-78"/>
+                <a:ea typeface="Amiri" pitchFamily="2" charset="-78"/>
                 <a:cs typeface="Amiri" pitchFamily="2" charset="-78"/>
               </a:rPr>
               <a:t>كَمْ تَذْكِرَةً؟</a:t>
@@ -42820,6 +43077,7 @@
                   <a:srgbClr val="1B3B6F"/>
                 </a:solidFill>
                 <a:latin typeface="Amiri" pitchFamily="2" charset="-78"/>
+                <a:ea typeface="Amiri" pitchFamily="2" charset="-78"/>
                 <a:cs typeface="Amiri" pitchFamily="2" charset="-78"/>
               </a:rPr>
               <a:t>هَلْ تُوجَدُ تَذْكِرَةٌ …؟</a:t>
@@ -42896,6 +43154,7 @@
                   <a:srgbClr val="1B3B6F"/>
                 </a:solidFill>
                 <a:latin typeface="Amiri" pitchFamily="2" charset="-78"/>
+                <a:ea typeface="Amiri" pitchFamily="2" charset="-78"/>
                 <a:cs typeface="Amiri" pitchFamily="2" charset="-78"/>
               </a:rPr>
               <a:t>ثَمَنُ التَّذْكِرَةِ خَمْسُونَ جُنَيْهًا.</a:t>
@@ -43064,6 +43323,7 @@
                   <a:srgbClr val="1B3B6F"/>
                 </a:solidFill>
                 <a:latin typeface="Amiri" pitchFamily="2" charset="-78"/>
+                <a:ea typeface="Amiri" pitchFamily="2" charset="-78"/>
                 <a:cs typeface="Amiri" pitchFamily="2" charset="-78"/>
               </a:rPr>
               <a:t>كَيْفَ الجَوُّ فِي …؟</a:t>
@@ -43140,6 +43400,7 @@
                   <a:srgbClr val="1B3B6F"/>
                 </a:solidFill>
                 <a:latin typeface="Amiri" pitchFamily="2" charset="-78"/>
+                <a:ea typeface="Amiri" pitchFamily="2" charset="-78"/>
                 <a:cs typeface="Amiri" pitchFamily="2" charset="-78"/>
               </a:rPr>
               <a:t>نَعَمْ، بِثَلَاثِينَ جُنَيْهًا.</a:t>
@@ -43308,6 +43569,7 @@
                   <a:srgbClr val="1B3B6F"/>
                 </a:solidFill>
                 <a:latin typeface="Amiri" pitchFamily="2" charset="-78"/>
+                <a:ea typeface="Amiri" pitchFamily="2" charset="-78"/>
                 <a:cs typeface="Amiri" pitchFamily="2" charset="-78"/>
               </a:rPr>
               <a:t>تَقَعُ مَدِينَتِي فِي … مِنْ …</a:t>
@@ -43384,6 +43646,7 @@
                   <a:srgbClr val="1B3B6F"/>
                 </a:solidFill>
                 <a:latin typeface="Amiri" pitchFamily="2" charset="-78"/>
+                <a:ea typeface="Amiri" pitchFamily="2" charset="-78"/>
                 <a:cs typeface="Amiri" pitchFamily="2" charset="-78"/>
               </a:rPr>
               <a:t>أَيْنَ تَقَعُ مَدِينَتُكَ؟</a:t>
@@ -43658,6 +43921,7 @@
                   <a:srgbClr val="D4AF37"/>
                 </a:solidFill>
                 <a:latin typeface="Amiri" pitchFamily="2" charset="-78"/>
+                <a:ea typeface="Amiri" pitchFamily="2" charset="-78"/>
                 <a:cs typeface="Amiri" pitchFamily="2" charset="-78"/>
               </a:rPr>
               <a:t>م</a:t>
@@ -43978,6 +44242,7 @@
                   <a:srgbClr val="8A6D1E"/>
                 </a:solidFill>
                 <a:latin typeface="Amiri" pitchFamily="2" charset="-78"/>
+                <a:ea typeface="Amiri" pitchFamily="2" charset="-78"/>
                 <a:cs typeface="Amiri" pitchFamily="2" charset="-78"/>
               </a:rPr>
               <a:t>حِذَاءٌ لِلْمَشْيِ فِي الجِبَالِ</a:t>
@@ -44258,6 +44523,7 @@
                   <a:srgbClr val="1B3B6F"/>
                 </a:solidFill>
                 <a:latin typeface="Amiri" pitchFamily="2" charset="-78"/>
+                <a:ea typeface="Amiri" pitchFamily="2" charset="-78"/>
                 <a:cs typeface="Amiri" pitchFamily="2" charset="-78"/>
               </a:rPr>
               <a:t>أَحْتَاجُ إِلَى … لِأَنِّي سَأَذْهَبُ إِلَى …</a:t>
@@ -44334,6 +44600,7 @@
                   <a:srgbClr val="1B3B6F"/>
                 </a:solidFill>
                 <a:latin typeface="Amiri" pitchFamily="2" charset="-78"/>
+                <a:ea typeface="Amiri" pitchFamily="2" charset="-78"/>
                 <a:cs typeface="Amiri" pitchFamily="2" charset="-78"/>
               </a:rPr>
               <a:t>أَهْلًا، مَاذَا تَحْتَاجُ؟</a:t>
@@ -44502,6 +44769,7 @@
                   <a:srgbClr val="1B3B6F"/>
                 </a:solidFill>
                 <a:latin typeface="Amiri" pitchFamily="2" charset="-78"/>
+                <a:ea typeface="Amiri" pitchFamily="2" charset="-78"/>
                 <a:cs typeface="Amiri" pitchFamily="2" charset="-78"/>
               </a:rPr>
               <a:t>الجَوُّ هُنَاكَ … وَتَسْقُطُ …</a:t>
@@ -44578,6 +44846,7 @@
                   <a:srgbClr val="1B3B6F"/>
                 </a:solidFill>
                 <a:latin typeface="Amiri" pitchFamily="2" charset="-78"/>
+                <a:ea typeface="Amiri" pitchFamily="2" charset="-78"/>
                 <a:cs typeface="Amiri" pitchFamily="2" charset="-78"/>
               </a:rPr>
               <a:t>كَيْفَ الطَّقْسُ هُنَاكَ؟</a:t>
@@ -44746,6 +45015,7 @@
                   <a:srgbClr val="1B3B6F"/>
                 </a:solidFill>
                 <a:latin typeface="Amiri" pitchFamily="2" charset="-78"/>
+                <a:ea typeface="Amiri" pitchFamily="2" charset="-78"/>
                 <a:cs typeface="Amiri" pitchFamily="2" charset="-78"/>
               </a:rPr>
               <a:t>مِمَّ هُوَ مَصْنُوعٌ؟ وَكَمْ ثَمَنُهُ؟</a:t>
@@ -44822,6 +45092,7 @@
                   <a:srgbClr val="1B3B6F"/>
                 </a:solidFill>
                 <a:latin typeface="Amiri" pitchFamily="2" charset="-78"/>
+                <a:ea typeface="Amiri" pitchFamily="2" charset="-78"/>
                 <a:cs typeface="Amiri" pitchFamily="2" charset="-78"/>
               </a:rPr>
               <a:t>هٰذَا الحِذَاءُ مُضَادٌّ لِلْمَاءِ.</a:t>
@@ -44925,6 +45196,7 @@
                   <a:srgbClr val="1B3B6F"/>
                 </a:solidFill>
                 <a:latin typeface="Amiri" pitchFamily="2" charset="-78"/>
+                <a:ea typeface="Amiri" pitchFamily="2" charset="-78"/>
                 <a:cs typeface="Amiri" pitchFamily="2" charset="-78"/>
               </a:rPr>
               <a:t>هُوَ أَغْلَى مِنْ … لٰكِنَّهُ أَ…</a:t>
@@ -45001,6 +45273,7 @@
                   <a:srgbClr val="1B3B6F"/>
                 </a:solidFill>
                 <a:latin typeface="Amiri" pitchFamily="2" charset="-78"/>
+                <a:ea typeface="Amiri" pitchFamily="2" charset="-78"/>
                 <a:cs typeface="Amiri" pitchFamily="2" charset="-78"/>
               </a:rPr>
               <a:t>مِنَ الجِلْدِ، وَثَمَنُهُ ثَمَانُونَ جُنَيْهًا.</a:t>
@@ -45104,6 +45377,7 @@
                   <a:srgbClr val="1B3B6F"/>
                 </a:solidFill>
                 <a:latin typeface="Amiri" pitchFamily="2" charset="-78"/>
+                <a:ea typeface="Amiri" pitchFamily="2" charset="-78"/>
                 <a:cs typeface="Amiri" pitchFamily="2" charset="-78"/>
               </a:rPr>
               <a:t>لَا، شُكْرًا، … لِأَنَّ …</a:t>
@@ -45180,6 +45454,7 @@
                   <a:srgbClr val="1B3B6F"/>
                 </a:solidFill>
                 <a:latin typeface="Amiri" pitchFamily="2" charset="-78"/>
+                <a:ea typeface="Amiri" pitchFamily="2" charset="-78"/>
                 <a:cs typeface="Amiri" pitchFamily="2" charset="-78"/>
               </a:rPr>
               <a:t>هَلْ تُرِيدُ كِيسًا بْلَاسْتِيكِيًّا؟</a:t>
@@ -45354,13 +45629,9 @@
     <a:fontScheme name="Office">
       <a:majorFont>
         <a:latin typeface="Calibri Light" panose="020F0302020204030204"/>
-        <a:ea typeface=""/>
-        <a:cs typeface=""/>
-        <a:font script="Jpan" typeface="游ゴシック Light"/>
-        <a:font script="Hang" typeface="맑은 고딕"/>
-        <a:font script="Hans" typeface="等线 Light"/>
-        <a:font script="Hant" typeface="新細明體"/>
-        <a:font script="Arab" typeface="Times New Roman"/>
+        <a:ea typeface="Amiri" pitchFamily="2" charset="-78"/>
+        <a:cs typeface="Amiri" pitchFamily="2" charset="-78"/>
+        <a:font script="Arab" typeface="Amiri"/>
         <a:font script="Hebr" typeface="Times New Roman"/>
         <a:font script="Thai" typeface="Angsana New"/>
         <a:font script="Ethi" typeface="Nyala"/>
@@ -45406,13 +45677,9 @@
       </a:majorFont>
       <a:minorFont>
         <a:latin typeface="Calibri" panose="020F0502020204030204"/>
-        <a:ea typeface=""/>
-        <a:cs typeface=""/>
-        <a:font script="Jpan" typeface="游ゴシック"/>
-        <a:font script="Hang" typeface="맑은 고딕"/>
-        <a:font script="Hans" typeface="等线"/>
-        <a:font script="Hant" typeface="新細明體"/>
-        <a:font script="Arab" typeface="Arial"/>
+        <a:ea typeface="Amiri" pitchFamily="2" charset="-78"/>
+        <a:cs typeface="Amiri" pitchFamily="2" charset="-78"/>
+        <a:font script="Arab" typeface="Amiri"/>
         <a:font script="Hebr" typeface="Arial"/>
         <a:font script="Thai" typeface="Cordia New"/>
         <a:font script="Ethi" typeface="Nyala"/>
